--- a/docs/ppt/Week2_公务员考试学习跟踪系统_阶段汇报.pptx
+++ b/docs/ppt/Week2_公务员考试学习跟踪系统_阶段汇报.pptx
@@ -3193,7 +3193,7 @@
         </p:nvSpPr>
         <p:spPr>
           <a:xfrm>
-            <a:off x="512064" y="1097280"/>
+            <a:off x="512064" y="1005840"/>
             <a:ext cx="11167567" cy="914400"/>
           </a:xfrm>
           <a:prstGeom prst="rect">
@@ -3211,7 +3211,7 @@
               <a:lnSpc>
                 <a:spcPct val="130000"/>
               </a:lnSpc>
-              <a:defRPr sz="4800" b="1">
+              <a:defRPr sz="4400" b="1">
                 <a:solidFill>
                   <a:srgbClr val="FFFFFF"/>
                 </a:solidFill>
@@ -3232,7 +3232,7 @@
         </p:nvSpPr>
         <p:spPr>
           <a:xfrm>
-            <a:off x="512064" y="2194560"/>
+            <a:off x="512064" y="2011680"/>
             <a:ext cx="11167567" cy="548640"/>
           </a:xfrm>
           <a:prstGeom prst="rect">
@@ -3250,7 +3250,7 @@
               <a:lnSpc>
                 <a:spcPct val="130000"/>
               </a:lnSpc>
-              <a:defRPr sz="2400" b="0">
+              <a:defRPr sz="2100" b="0">
                 <a:solidFill>
                   <a:srgbClr val="E8F4FC"/>
                 </a:solidFill>
@@ -3271,7 +3271,7 @@
         </p:nvSpPr>
         <p:spPr>
           <a:xfrm>
-            <a:off x="4267047" y="3200400"/>
+            <a:off x="4267047" y="2926080"/>
             <a:ext cx="3657600" cy="25400"/>
           </a:xfrm>
           <a:prstGeom prst="rect">
@@ -3314,7 +3314,7 @@
         </p:nvSpPr>
         <p:spPr>
           <a:xfrm>
-            <a:off x="6040983" y="3154680"/>
+            <a:off x="6040983" y="2880360"/>
             <a:ext cx="109728" cy="109728"/>
           </a:xfrm>
           <a:prstGeom prst="ellipse">
@@ -3357,7 +3357,7 @@
         </p:nvSpPr>
         <p:spPr>
           <a:xfrm>
-            <a:off x="512064" y="3840480"/>
+            <a:off x="512064" y="3474720"/>
             <a:ext cx="11167567" cy="1828800"/>
           </a:xfrm>
           <a:prstGeom prst="rect">
@@ -3373,9 +3373,9 @@
           <a:p>
             <a:pPr algn="ctr">
               <a:lnSpc>
-                <a:spcPct val="150000"/>
+                <a:spcPct val="125000"/>
               </a:lnSpc>
-              <a:defRPr sz="2000" b="0">
+              <a:defRPr sz="1700" b="0">
                 <a:solidFill>
                   <a:srgbClr val="666666"/>
                 </a:solidFill>
@@ -3408,7 +3408,7 @@
         </p:nvSpPr>
         <p:spPr>
           <a:xfrm>
-            <a:off x="512064" y="6400800"/>
+            <a:off x="512064" y="6528816"/>
             <a:ext cx="11167567" cy="12700"/>
           </a:xfrm>
           <a:prstGeom prst="rect">
@@ -3451,7 +3451,7 @@
         </p:nvSpPr>
         <p:spPr>
           <a:xfrm>
-            <a:off x="10948111" y="6492240"/>
+            <a:off x="10948111" y="6620256"/>
             <a:ext cx="731520" cy="274320"/>
           </a:xfrm>
           <a:prstGeom prst="rect">
@@ -3506,7 +3506,7 @@
         <p:spPr>
           <a:xfrm>
             <a:off x="0" y="0"/>
-            <a:ext cx="12191695" cy="886968"/>
+            <a:ext cx="12191695" cy="658368"/>
           </a:xfrm>
           <a:prstGeom prst="rect">
             <a:avLst/>
@@ -3549,7 +3549,7 @@
         <p:spPr>
           <a:xfrm>
             <a:off x="0" y="0"/>
-            <a:ext cx="54864" cy="886968"/>
+            <a:ext cx="54864" cy="658368"/>
           </a:xfrm>
           <a:prstGeom prst="rect">
             <a:avLst/>
@@ -3591,7 +3591,7 @@
         </p:nvSpPr>
         <p:spPr>
           <a:xfrm>
-            <a:off x="10308031" y="283464"/>
+            <a:off x="10308031" y="169164"/>
             <a:ext cx="1371600" cy="320040"/>
           </a:xfrm>
           <a:prstGeom prst="roundRect">
@@ -3650,7 +3650,7 @@
         </p:nvSpPr>
         <p:spPr>
           <a:xfrm>
-            <a:off x="603504" y="260604"/>
+            <a:off x="603504" y="146304"/>
             <a:ext cx="9613087" cy="457200"/>
           </a:xfrm>
           <a:prstGeom prst="rect">
@@ -3665,7 +3665,7 @@
           <a:lstStyle/>
           <a:p>
             <a:pPr>
-              <a:defRPr sz="2400" b="1">
+              <a:defRPr sz="2000" b="1">
                 <a:solidFill>
                   <a:srgbClr val="FFFFFF"/>
                 </a:solidFill>
@@ -3686,8 +3686,8 @@
         </p:nvSpPr>
         <p:spPr>
           <a:xfrm>
-            <a:off x="512064" y="1508760"/>
-            <a:ext cx="2620441" cy="1463040"/>
+            <a:off x="512064" y="1033272"/>
+            <a:ext cx="2654731" cy="1143000"/>
           </a:xfrm>
           <a:prstGeom prst="roundRect">
             <a:avLst/>
@@ -3719,38 +3719,38 @@
           <a:p>
             <a:pPr algn="ctr">
               <a:spcAft>
+                <a:spcPts val="200"/>
+              </a:spcAft>
+              <a:defRPr sz="3000" b="1">
+                <a:solidFill>
+                  <a:srgbClr val="0066CC"/>
+                </a:solidFill>
+                <a:latin typeface="Microsoft YaHei"/>
+              </a:defRPr>
+            </a:pPr>
+            <a:r>
+              <a:t>7/7</a:t>
+            </a:r>
+          </a:p>
+          <a:p>
+            <a:pPr algn="ctr">
+              <a:spcAft>
                 <a:spcPts val="400"/>
               </a:spcAft>
-              <a:defRPr sz="3600" b="1">
-                <a:solidFill>
-                  <a:srgbClr val="0066CC"/>
-                </a:solidFill>
-                <a:latin typeface="Microsoft YaHei"/>
-              </a:defRPr>
-            </a:pPr>
-            <a:r>
-              <a:t>7/7</a:t>
+              <a:defRPr sz="1100">
+                <a:solidFill>
+                  <a:srgbClr val="666666"/>
+                </a:solidFill>
+                <a:latin typeface="Microsoft YaHei"/>
+              </a:defRPr>
+            </a:pPr>
+            <a:r>
+              <a:t>个</a:t>
             </a:r>
           </a:p>
           <a:p>
             <a:pPr algn="ctr">
-              <a:spcAft>
-                <a:spcPts val="800"/>
-              </a:spcAft>
-              <a:defRPr sz="1400">
-                <a:solidFill>
-                  <a:srgbClr val="666666"/>
-                </a:solidFill>
-                <a:latin typeface="Microsoft YaHei"/>
-              </a:defRPr>
-            </a:pPr>
-            <a:r>
-              <a:t>个</a:t>
-            </a:r>
-          </a:p>
-          <a:p>
-            <a:pPr algn="ctr">
-              <a:defRPr sz="1400">
+              <a:defRPr sz="1100">
                 <a:solidFill>
                   <a:srgbClr val="333333"/>
                 </a:solidFill>
@@ -3771,8 +3771,8 @@
         </p:nvSpPr>
         <p:spPr>
           <a:xfrm>
-            <a:off x="3361105" y="1508760"/>
-            <a:ext cx="2620441" cy="1463040"/>
+            <a:off x="3349675" y="1033272"/>
+            <a:ext cx="2654731" cy="1143000"/>
           </a:xfrm>
           <a:prstGeom prst="roundRect">
             <a:avLst/>
@@ -3804,38 +3804,38 @@
           <a:p>
             <a:pPr algn="ctr">
               <a:spcAft>
+                <a:spcPts val="200"/>
+              </a:spcAft>
+              <a:defRPr sz="3000" b="1">
+                <a:solidFill>
+                  <a:srgbClr val="0066CC"/>
+                </a:solidFill>
+                <a:latin typeface="Microsoft YaHei"/>
+              </a:defRPr>
+            </a:pPr>
+            <a:r>
+              <a:t>12</a:t>
+            </a:r>
+          </a:p>
+          <a:p>
+            <a:pPr algn="ctr">
+              <a:spcAft>
                 <a:spcPts val="400"/>
               </a:spcAft>
-              <a:defRPr sz="3600" b="1">
-                <a:solidFill>
-                  <a:srgbClr val="0066CC"/>
-                </a:solidFill>
-                <a:latin typeface="Microsoft YaHei"/>
-              </a:defRPr>
-            </a:pPr>
-            <a:r>
-              <a:t>12</a:t>
+              <a:defRPr sz="1100">
+                <a:solidFill>
+                  <a:srgbClr val="666666"/>
+                </a:solidFill>
+                <a:latin typeface="Microsoft YaHei"/>
+              </a:defRPr>
+            </a:pPr>
+            <a:r>
+              <a:t>张</a:t>
             </a:r>
           </a:p>
           <a:p>
             <a:pPr algn="ctr">
-              <a:spcAft>
-                <a:spcPts val="800"/>
-              </a:spcAft>
-              <a:defRPr sz="1400">
-                <a:solidFill>
-                  <a:srgbClr val="666666"/>
-                </a:solidFill>
-                <a:latin typeface="Microsoft YaHei"/>
-              </a:defRPr>
-            </a:pPr>
-            <a:r>
-              <a:t>张</a:t>
-            </a:r>
-          </a:p>
-          <a:p>
-            <a:pPr algn="ctr">
-              <a:defRPr sz="1400">
+              <a:defRPr sz="1100">
                 <a:solidFill>
                   <a:srgbClr val="333333"/>
                 </a:solidFill>
@@ -3856,8 +3856,8 @@
         </p:nvSpPr>
         <p:spPr>
           <a:xfrm>
-            <a:off x="6210147" y="1508760"/>
-            <a:ext cx="2620441" cy="1463040"/>
+            <a:off x="6187287" y="1033272"/>
+            <a:ext cx="2654731" cy="1143000"/>
           </a:xfrm>
           <a:prstGeom prst="roundRect">
             <a:avLst/>
@@ -3889,38 +3889,38 @@
           <a:p>
             <a:pPr algn="ctr">
               <a:spcAft>
+                <a:spcPts val="200"/>
+              </a:spcAft>
+              <a:defRPr sz="3000" b="1">
+                <a:solidFill>
+                  <a:srgbClr val="0066CC"/>
+                </a:solidFill>
+                <a:latin typeface="Microsoft YaHei"/>
+              </a:defRPr>
+            </a:pPr>
+            <a:r>
+              <a:t>200</a:t>
+            </a:r>
+          </a:p>
+          <a:p>
+            <a:pPr algn="ctr">
+              <a:spcAft>
                 <a:spcPts val="400"/>
               </a:spcAft>
-              <a:defRPr sz="3600" b="1">
-                <a:solidFill>
-                  <a:srgbClr val="0066CC"/>
-                </a:solidFill>
-                <a:latin typeface="Microsoft YaHei"/>
-              </a:defRPr>
-            </a:pPr>
-            <a:r>
-              <a:t>200</a:t>
+              <a:defRPr sz="1100">
+                <a:solidFill>
+                  <a:srgbClr val="666666"/>
+                </a:solidFill>
+                <a:latin typeface="Microsoft YaHei"/>
+              </a:defRPr>
+            </a:pPr>
+            <a:r>
+              <a:t>题</a:t>
             </a:r>
           </a:p>
           <a:p>
             <a:pPr algn="ctr">
-              <a:spcAft>
-                <a:spcPts val="800"/>
-              </a:spcAft>
-              <a:defRPr sz="1400">
-                <a:solidFill>
-                  <a:srgbClr val="666666"/>
-                </a:solidFill>
-                <a:latin typeface="Microsoft YaHei"/>
-              </a:defRPr>
-            </a:pPr>
-            <a:r>
-              <a:t>题</a:t>
-            </a:r>
-          </a:p>
-          <a:p>
-            <a:pPr algn="ctr">
-              <a:defRPr sz="1400">
+              <a:defRPr sz="1100">
                 <a:solidFill>
                   <a:srgbClr val="333333"/>
                 </a:solidFill>
@@ -3941,8 +3941,8 @@
         </p:nvSpPr>
         <p:spPr>
           <a:xfrm>
-            <a:off x="9059189" y="1508760"/>
-            <a:ext cx="2620441" cy="1463040"/>
+            <a:off x="9024899" y="1033272"/>
+            <a:ext cx="2654731" cy="1143000"/>
           </a:xfrm>
           <a:prstGeom prst="roundRect">
             <a:avLst/>
@@ -3974,38 +3974,38 @@
           <a:p>
             <a:pPr algn="ctr">
               <a:spcAft>
+                <a:spcPts val="200"/>
+              </a:spcAft>
+              <a:defRPr sz="3000" b="1">
+                <a:solidFill>
+                  <a:srgbClr val="0066CC"/>
+                </a:solidFill>
+                <a:latin typeface="Microsoft YaHei"/>
+              </a:defRPr>
+            </a:pPr>
+            <a:r>
+              <a:t>23</a:t>
+            </a:r>
+          </a:p>
+          <a:p>
+            <a:pPr algn="ctr">
+              <a:spcAft>
                 <a:spcPts val="400"/>
               </a:spcAft>
-              <a:defRPr sz="3600" b="1">
-                <a:solidFill>
-                  <a:srgbClr val="0066CC"/>
-                </a:solidFill>
-                <a:latin typeface="Microsoft YaHei"/>
-              </a:defRPr>
-            </a:pPr>
-            <a:r>
-              <a:t>23</a:t>
+              <a:defRPr sz="1100">
+                <a:solidFill>
+                  <a:srgbClr val="666666"/>
+                </a:solidFill>
+                <a:latin typeface="Microsoft YaHei"/>
+              </a:defRPr>
+            </a:pPr>
+            <a:r>
+              <a:t>条</a:t>
             </a:r>
           </a:p>
           <a:p>
             <a:pPr algn="ctr">
-              <a:spcAft>
-                <a:spcPts val="800"/>
-              </a:spcAft>
-              <a:defRPr sz="1400">
-                <a:solidFill>
-                  <a:srgbClr val="666666"/>
-                </a:solidFill>
-                <a:latin typeface="Microsoft YaHei"/>
-              </a:defRPr>
-            </a:pPr>
-            <a:r>
-              <a:t>条</a:t>
-            </a:r>
-          </a:p>
-          <a:p>
-            <a:pPr algn="ctr">
-              <a:defRPr sz="1400">
+              <a:defRPr sz="1100">
                 <a:solidFill>
                   <a:srgbClr val="333333"/>
                 </a:solidFill>
@@ -4026,8 +4026,8 @@
         </p:nvSpPr>
         <p:spPr>
           <a:xfrm>
-            <a:off x="512064" y="3154680"/>
-            <a:ext cx="11167567" cy="3008376"/>
+            <a:off x="512064" y="2496312"/>
+            <a:ext cx="11167567" cy="3877056"/>
           </a:xfrm>
           <a:prstGeom prst="rect">
             <a:avLst/>
@@ -4042,12 +4042,12 @@
           <a:p>
             <a:pPr>
               <a:lnSpc>
-                <a:spcPct val="130000"/>
+                <a:spcPct val="110000"/>
               </a:lnSpc>
               <a:spcAft>
-                <a:spcPts val="1000"/>
-              </a:spcAft>
-              <a:defRPr sz="1800">
+                <a:spcPts val="400"/>
+              </a:spcAft>
+              <a:defRPr sz="1700">
                 <a:solidFill>
                   <a:srgbClr val="333333"/>
                 </a:solidFill>
@@ -4061,12 +4061,12 @@
           <a:p>
             <a:pPr>
               <a:lnSpc>
-                <a:spcPct val="130000"/>
+                <a:spcPct val="110000"/>
               </a:lnSpc>
               <a:spcAft>
-                <a:spcPts val="1000"/>
-              </a:spcAft>
-              <a:defRPr sz="1800">
+                <a:spcPts val="400"/>
+              </a:spcAft>
+              <a:defRPr sz="1700">
                 <a:solidFill>
                   <a:srgbClr val="333333"/>
                 </a:solidFill>
@@ -4080,12 +4080,12 @@
           <a:p>
             <a:pPr>
               <a:lnSpc>
-                <a:spcPct val="130000"/>
+                <a:spcPct val="110000"/>
               </a:lnSpc>
               <a:spcAft>
-                <a:spcPts val="1000"/>
-              </a:spcAft>
-              <a:defRPr sz="1800">
+                <a:spcPts val="400"/>
+              </a:spcAft>
+              <a:defRPr sz="1700">
                 <a:solidFill>
                   <a:srgbClr val="333333"/>
                 </a:solidFill>
@@ -4106,7 +4106,7 @@
         </p:nvSpPr>
         <p:spPr>
           <a:xfrm>
-            <a:off x="512064" y="6400800"/>
+            <a:off x="512064" y="6528816"/>
             <a:ext cx="11167567" cy="12700"/>
           </a:xfrm>
           <a:prstGeom prst="rect">
@@ -4149,7 +4149,7 @@
         </p:nvSpPr>
         <p:spPr>
           <a:xfrm>
-            <a:off x="10948111" y="6492240"/>
+            <a:off x="10948111" y="6620256"/>
             <a:ext cx="731520" cy="274320"/>
           </a:xfrm>
           <a:prstGeom prst="rect">
@@ -4204,7 +4204,7 @@
         <p:spPr>
           <a:xfrm>
             <a:off x="0" y="0"/>
-            <a:ext cx="12191695" cy="886968"/>
+            <a:ext cx="12191695" cy="658368"/>
           </a:xfrm>
           <a:prstGeom prst="rect">
             <a:avLst/>
@@ -4247,7 +4247,7 @@
         <p:spPr>
           <a:xfrm>
             <a:off x="0" y="0"/>
-            <a:ext cx="54864" cy="886968"/>
+            <a:ext cx="54864" cy="658368"/>
           </a:xfrm>
           <a:prstGeom prst="rect">
             <a:avLst/>
@@ -4289,7 +4289,7 @@
         </p:nvSpPr>
         <p:spPr>
           <a:xfrm>
-            <a:off x="10308031" y="283464"/>
+            <a:off x="10308031" y="169164"/>
             <a:ext cx="1371600" cy="320040"/>
           </a:xfrm>
           <a:prstGeom prst="roundRect">
@@ -4348,7 +4348,7 @@
         </p:nvSpPr>
         <p:spPr>
           <a:xfrm>
-            <a:off x="603504" y="260604"/>
+            <a:off x="603504" y="146304"/>
             <a:ext cx="9613087" cy="457200"/>
           </a:xfrm>
           <a:prstGeom prst="rect">
@@ -4363,7 +4363,7 @@
           <a:lstStyle/>
           <a:p>
             <a:pPr>
-              <a:defRPr sz="2400" b="1">
+              <a:defRPr sz="2000" b="1">
                 <a:solidFill>
                   <a:srgbClr val="FFFFFF"/>
                 </a:solidFill>
@@ -4384,8 +4384,8 @@
         </p:nvSpPr>
         <p:spPr>
           <a:xfrm>
-            <a:off x="512064" y="1325880"/>
-            <a:ext cx="11167567" cy="4837176"/>
+            <a:off x="512064" y="941832"/>
+            <a:ext cx="11167567" cy="5431536"/>
           </a:xfrm>
           <a:prstGeom prst="rect">
             <a:avLst/>
@@ -4400,12 +4400,12 @@
           <a:p>
             <a:pPr>
               <a:lnSpc>
-                <a:spcPct val="130000"/>
+                <a:spcPct val="110000"/>
               </a:lnSpc>
               <a:spcAft>
-                <a:spcPts val="1000"/>
-              </a:spcAft>
-              <a:defRPr sz="2000">
+                <a:spcPts val="400"/>
+              </a:spcAft>
+              <a:defRPr sz="1700">
                 <a:solidFill>
                   <a:srgbClr val="333333"/>
                 </a:solidFill>
@@ -4419,12 +4419,12 @@
           <a:p>
             <a:pPr>
               <a:lnSpc>
-                <a:spcPct val="130000"/>
+                <a:spcPct val="110000"/>
               </a:lnSpc>
               <a:spcAft>
-                <a:spcPts val="1000"/>
-              </a:spcAft>
-              <a:defRPr sz="2000">
+                <a:spcPts val="400"/>
+              </a:spcAft>
+              <a:defRPr sz="1700">
                 <a:solidFill>
                   <a:srgbClr val="333333"/>
                 </a:solidFill>
@@ -4438,12 +4438,12 @@
           <a:p>
             <a:pPr>
               <a:lnSpc>
-                <a:spcPct val="130000"/>
+                <a:spcPct val="110000"/>
               </a:lnSpc>
               <a:spcAft>
-                <a:spcPts val="1000"/>
-              </a:spcAft>
-              <a:defRPr sz="2000">
+                <a:spcPts val="400"/>
+              </a:spcAft>
+              <a:defRPr sz="1700">
                 <a:solidFill>
                   <a:srgbClr val="333333"/>
                 </a:solidFill>
@@ -4457,12 +4457,12 @@
           <a:p>
             <a:pPr>
               <a:lnSpc>
-                <a:spcPct val="130000"/>
+                <a:spcPct val="110000"/>
               </a:lnSpc>
               <a:spcAft>
-                <a:spcPts val="1000"/>
-              </a:spcAft>
-              <a:defRPr sz="2000">
+                <a:spcPts val="400"/>
+              </a:spcAft>
+              <a:defRPr sz="1700">
                 <a:solidFill>
                   <a:srgbClr val="333333"/>
                 </a:solidFill>
@@ -4476,12 +4476,12 @@
           <a:p>
             <a:pPr>
               <a:lnSpc>
-                <a:spcPct val="130000"/>
+                <a:spcPct val="110000"/>
               </a:lnSpc>
               <a:spcAft>
-                <a:spcPts val="1000"/>
-              </a:spcAft>
-              <a:defRPr sz="2000">
+                <a:spcPts val="400"/>
+              </a:spcAft>
+              <a:defRPr sz="1700">
                 <a:solidFill>
                   <a:srgbClr val="333333"/>
                 </a:solidFill>
@@ -4502,7 +4502,7 @@
         </p:nvSpPr>
         <p:spPr>
           <a:xfrm>
-            <a:off x="512064" y="6400800"/>
+            <a:off x="512064" y="6528816"/>
             <a:ext cx="11167567" cy="12700"/>
           </a:xfrm>
           <a:prstGeom prst="rect">
@@ -4545,7 +4545,7 @@
         </p:nvSpPr>
         <p:spPr>
           <a:xfrm>
-            <a:off x="10948111" y="6492240"/>
+            <a:off x="10948111" y="6620256"/>
             <a:ext cx="731520" cy="274320"/>
           </a:xfrm>
           <a:prstGeom prst="rect">
@@ -4703,7 +4703,7 @@
               <a:lnSpc>
                 <a:spcPct val="130000"/>
               </a:lnSpc>
-              <a:defRPr sz="4800" b="1">
+              <a:defRPr sz="4400" b="1">
                 <a:solidFill>
                   <a:srgbClr val="FFFFFF"/>
                 </a:solidFill>
@@ -4724,7 +4724,7 @@
         </p:nvSpPr>
         <p:spPr>
           <a:xfrm>
-            <a:off x="512064" y="3200400"/>
+            <a:off x="512064" y="3108960"/>
             <a:ext cx="11167567" cy="548640"/>
           </a:xfrm>
           <a:prstGeom prst="rect">
@@ -4742,7 +4742,7 @@
               <a:lnSpc>
                 <a:spcPct val="130000"/>
               </a:lnSpc>
-              <a:defRPr sz="2400" b="0">
+              <a:defRPr sz="2100" b="0">
                 <a:solidFill>
                   <a:srgbClr val="E8F4FC"/>
                 </a:solidFill>
@@ -4763,7 +4763,7 @@
         </p:nvSpPr>
         <p:spPr>
           <a:xfrm>
-            <a:off x="512064" y="4114800"/>
+            <a:off x="512064" y="3840480"/>
             <a:ext cx="11167567" cy="1371600"/>
           </a:xfrm>
           <a:prstGeom prst="rect">
@@ -4779,9 +4779,9 @@
           <a:p>
             <a:pPr algn="ctr">
               <a:lnSpc>
-                <a:spcPct val="150000"/>
+                <a:spcPct val="125000"/>
               </a:lnSpc>
-              <a:defRPr sz="1600" b="0">
+              <a:defRPr sz="1400" b="0">
                 <a:solidFill>
                   <a:srgbClr val="CCCCCC"/>
                 </a:solidFill>
@@ -4806,7 +4806,7 @@
         </p:nvSpPr>
         <p:spPr>
           <a:xfrm>
-            <a:off x="512064" y="6400800"/>
+            <a:off x="512064" y="6528816"/>
             <a:ext cx="11167567" cy="12700"/>
           </a:xfrm>
           <a:prstGeom prst="rect">
@@ -4849,7 +4849,7 @@
         </p:nvSpPr>
         <p:spPr>
           <a:xfrm>
-            <a:off x="10948111" y="6492240"/>
+            <a:off x="10948111" y="6620256"/>
             <a:ext cx="731520" cy="274320"/>
           </a:xfrm>
           <a:prstGeom prst="rect">
@@ -4904,7 +4904,7 @@
         <p:spPr>
           <a:xfrm>
             <a:off x="0" y="0"/>
-            <a:ext cx="12191695" cy="886968"/>
+            <a:ext cx="12191695" cy="658368"/>
           </a:xfrm>
           <a:prstGeom prst="rect">
             <a:avLst/>
@@ -4947,7 +4947,7 @@
         <p:spPr>
           <a:xfrm>
             <a:off x="0" y="0"/>
-            <a:ext cx="54864" cy="886968"/>
+            <a:ext cx="54864" cy="658368"/>
           </a:xfrm>
           <a:prstGeom prst="rect">
             <a:avLst/>
@@ -4989,7 +4989,7 @@
         </p:nvSpPr>
         <p:spPr>
           <a:xfrm>
-            <a:off x="10308031" y="283464"/>
+            <a:off x="10308031" y="169164"/>
             <a:ext cx="1371600" cy="320040"/>
           </a:xfrm>
           <a:prstGeom prst="roundRect">
@@ -5048,7 +5048,7 @@
         </p:nvSpPr>
         <p:spPr>
           <a:xfrm>
-            <a:off x="603504" y="260604"/>
+            <a:off x="603504" y="146304"/>
             <a:ext cx="9613087" cy="457200"/>
           </a:xfrm>
           <a:prstGeom prst="rect">
@@ -5063,7 +5063,7 @@
           <a:lstStyle/>
           <a:p>
             <a:pPr>
-              <a:defRPr sz="2400" b="1">
+              <a:defRPr sz="2000" b="1">
                 <a:solidFill>
                   <a:srgbClr val="FFFFFF"/>
                 </a:solidFill>
@@ -5084,8 +5084,8 @@
         </p:nvSpPr>
         <p:spPr>
           <a:xfrm>
-            <a:off x="512064" y="1143000"/>
-            <a:ext cx="2286000" cy="548640"/>
+            <a:off x="512064" y="804672"/>
+            <a:ext cx="2286000" cy="457200"/>
           </a:xfrm>
           <a:prstGeom prst="rect">
             <a:avLst/>
@@ -5102,7 +5102,7 @@
               <a:lnSpc>
                 <a:spcPct val="130000"/>
               </a:lnSpc>
-              <a:defRPr sz="3200" b="1">
+              <a:defRPr sz="2600" b="1">
                 <a:solidFill>
                   <a:srgbClr val="003366"/>
                 </a:solidFill>
@@ -5123,8 +5123,8 @@
         </p:nvSpPr>
         <p:spPr>
           <a:xfrm>
-            <a:off x="512064" y="1965960"/>
-            <a:ext cx="11167567" cy="4105656"/>
+            <a:off x="512064" y="1399032"/>
+            <a:ext cx="5423763" cy="4928616"/>
           </a:xfrm>
           <a:prstGeom prst="rect">
             <a:avLst/>
@@ -5139,9 +5139,9 @@
           <a:p>
             <a:pPr>
               <a:spcAft>
-                <a:spcPts val="400"/>
-              </a:spcAft>
-              <a:defRPr sz="2200" b="1">
+                <a:spcPts val="200"/>
+              </a:spcAft>
+              <a:defRPr sz="1600" b="1">
                 <a:solidFill>
                   <a:srgbClr val="003366"/>
                 </a:solidFill>
@@ -5149,15 +5149,15 @@
               </a:defRPr>
             </a:pPr>
             <a:r>
-              <a:t>01    Week 1 回顾</a:t>
+              <a:t>01  Week 1 回顾</a:t>
             </a:r>
           </a:p>
           <a:p>
             <a:pPr>
               <a:spcAft>
-                <a:spcPts val="1600"/>
-              </a:spcAft>
-              <a:defRPr sz="1400">
+                <a:spcPts val="1000"/>
+              </a:spcAft>
+              <a:defRPr sz="1100">
                 <a:solidFill>
                   <a:srgbClr val="666666"/>
                 </a:solidFill>
@@ -5165,15 +5165,15 @@
               </a:defRPr>
             </a:pPr>
             <a:r>
-              <a:t>        基础设施、数据库、用户与资源模块</a:t>
+              <a:t>     基础设施、数据库、用户与资源模块</a:t>
             </a:r>
           </a:p>
           <a:p>
             <a:pPr>
               <a:spcAft>
-                <a:spcPts val="400"/>
-              </a:spcAft>
-              <a:defRPr sz="2200" b="1">
+                <a:spcPts val="200"/>
+              </a:spcAft>
+              <a:defRPr sz="1600" b="1">
                 <a:solidFill>
                   <a:srgbClr val="003366"/>
                 </a:solidFill>
@@ -5181,15 +5181,15 @@
               </a:defRPr>
             </a:pPr>
             <a:r>
-              <a:t>02    Week 2 概览</a:t>
+              <a:t>02  Week 2 概览</a:t>
             </a:r>
           </a:p>
           <a:p>
             <a:pPr>
               <a:spcAft>
-                <a:spcPts val="1600"/>
-              </a:spcAft>
-              <a:defRPr sz="1400">
+                <a:spcPts val="1000"/>
+              </a:spcAft>
+              <a:defRPr sz="1100">
                 <a:solidFill>
                   <a:srgbClr val="666666"/>
                 </a:solidFill>
@@ -5197,15 +5197,15 @@
               </a:defRPr>
             </a:pPr>
             <a:r>
-              <a:t>        完成 6 大核心业务模块</a:t>
+              <a:t>     完成 6 大核心业务模块</a:t>
             </a:r>
           </a:p>
           <a:p>
             <a:pPr>
               <a:spcAft>
-                <a:spcPts val="400"/>
-              </a:spcAft>
-              <a:defRPr sz="2200" b="1">
+                <a:spcPts val="200"/>
+              </a:spcAft>
+              <a:defRPr sz="1600" b="1">
                 <a:solidFill>
                   <a:srgbClr val="003366"/>
                 </a:solidFill>
@@ -5213,15 +5213,15 @@
               </a:defRPr>
             </a:pPr>
             <a:r>
-              <a:t>03    题库与练习</a:t>
+              <a:t>03  题库与练习</a:t>
             </a:r>
           </a:p>
           <a:p>
             <a:pPr>
               <a:spcAft>
-                <a:spcPts val="1600"/>
-              </a:spcAft>
-              <a:defRPr sz="1400">
+                <a:spcPts val="1000"/>
+              </a:spcAft>
+              <a:defRPr sz="1100">
                 <a:solidFill>
                   <a:srgbClr val="666666"/>
                 </a:solidFill>
@@ -5229,15 +5229,15 @@
               </a:defRPr>
             </a:pPr>
             <a:r>
-              <a:t>        200 道题 + 单选/多选/判断</a:t>
+              <a:t>     200 道题 + 单选/多选/判断</a:t>
             </a:r>
           </a:p>
           <a:p>
             <a:pPr>
               <a:spcAft>
-                <a:spcPts val="400"/>
-              </a:spcAft>
-              <a:defRPr sz="2200" b="1">
+                <a:spcPts val="200"/>
+              </a:spcAft>
+              <a:defRPr sz="1600" b="1">
                 <a:solidFill>
                   <a:srgbClr val="003366"/>
                 </a:solidFill>
@@ -5245,15 +5245,15 @@
               </a:defRPr>
             </a:pPr>
             <a:r>
-              <a:t>04    智能学习计划</a:t>
+              <a:t>04  智能学习计划</a:t>
             </a:r>
           </a:p>
           <a:p>
             <a:pPr>
               <a:spcAft>
-                <a:spcPts val="1600"/>
-              </a:spcAft>
-              <a:defRPr sz="1400">
+                <a:spcPts val="1000"/>
+              </a:spcAft>
+              <a:defRPr sz="1100">
                 <a:solidFill>
                   <a:srgbClr val="666666"/>
                 </a:solidFill>
@@ -5261,15 +5261,38 @@
               </a:defRPr>
             </a:pPr>
             <a:r>
-              <a:t>        科目权重 × 难度 + 弱项加权</a:t>
-            </a:r>
-          </a:p>
+              <a:t>     科目权重 × 难度 + 弱项加权</a:t>
+            </a:r>
+          </a:p>
+        </p:txBody>
+      </p:sp>
+      <p:sp>
+        <p:nvSpPr>
+          <p:cNvPr id="8" name="TextBox 7"/>
+          <p:cNvSpPr txBox="1"/>
+          <p:nvPr/>
+        </p:nvSpPr>
+        <p:spPr>
+          <a:xfrm>
+            <a:off x="6255867" y="1399032"/>
+            <a:ext cx="5423763" cy="4928616"/>
+          </a:xfrm>
+          <a:prstGeom prst="rect">
+            <a:avLst/>
+          </a:prstGeom>
+          <a:noFill/>
+        </p:spPr>
+        <p:txBody>
+          <a:bodyPr wrap="square">
+            <a:spAutoFit/>
+          </a:bodyPr>
+          <a:lstStyle/>
           <a:p>
             <a:pPr>
               <a:spcAft>
-                <a:spcPts val="400"/>
-              </a:spcAft>
-              <a:defRPr sz="2200" b="1">
+                <a:spcPts val="200"/>
+              </a:spcAft>
+              <a:defRPr sz="1600" b="1">
                 <a:solidFill>
                   <a:srgbClr val="003366"/>
                 </a:solidFill>
@@ -5277,15 +5300,15 @@
               </a:defRPr>
             </a:pPr>
             <a:r>
-              <a:t>05    学习进度统计</a:t>
+              <a:t>05  学习进度统计</a:t>
             </a:r>
           </a:p>
           <a:p>
             <a:pPr>
               <a:spcAft>
-                <a:spcPts val="1600"/>
-              </a:spcAft>
-              <a:defRPr sz="1400">
+                <a:spcPts val="1000"/>
+              </a:spcAft>
+              <a:defRPr sz="1100">
                 <a:solidFill>
                   <a:srgbClr val="666666"/>
                 </a:solidFill>
@@ -5293,15 +5316,15 @@
               </a:defRPr>
             </a:pPr>
             <a:r>
-              <a:t>        答题历史 + 正确率 + 可视化</a:t>
+              <a:t>     答题历史 + 正确率 + 可视化</a:t>
             </a:r>
           </a:p>
           <a:p>
             <a:pPr>
               <a:spcAft>
-                <a:spcPts val="400"/>
-              </a:spcAft>
-              <a:defRPr sz="2200" b="1">
+                <a:spcPts val="200"/>
+              </a:spcAft>
+              <a:defRPr sz="1600" b="1">
                 <a:solidFill>
                   <a:srgbClr val="003366"/>
                 </a:solidFill>
@@ -5309,15 +5332,15 @@
               </a:defRPr>
             </a:pPr>
             <a:r>
-              <a:t>06    弱项识别与推荐</a:t>
+              <a:t>06  弱项识别与推荐</a:t>
             </a:r>
           </a:p>
           <a:p>
             <a:pPr>
               <a:spcAft>
-                <a:spcPts val="1600"/>
-              </a:spcAft>
-              <a:defRPr sz="1400">
+                <a:spcPts val="1000"/>
+              </a:spcAft>
+              <a:defRPr sz="1100">
                 <a:solidFill>
                   <a:srgbClr val="666666"/>
                 </a:solidFill>
@@ -5325,15 +5348,15 @@
               </a:defRPr>
             </a:pPr>
             <a:r>
-              <a:t>        答题量 ≥ 5 且正确率 &lt; 60%</a:t>
+              <a:t>     答题量 ≥ 5 且正确率 &lt; 60%</a:t>
             </a:r>
           </a:p>
           <a:p>
             <a:pPr>
               <a:spcAft>
-                <a:spcPts val="400"/>
-              </a:spcAft>
-              <a:defRPr sz="2200" b="1">
+                <a:spcPts val="200"/>
+              </a:spcAft>
+              <a:defRPr sz="1600" b="1">
                 <a:solidFill>
                   <a:srgbClr val="003366"/>
                 </a:solidFill>
@@ -5341,15 +5364,15 @@
               </a:defRPr>
             </a:pPr>
             <a:r>
-              <a:t>07    解析与答疑</a:t>
+              <a:t>07  解析与答疑</a:t>
             </a:r>
           </a:p>
           <a:p>
             <a:pPr>
               <a:spcAft>
-                <a:spcPts val="1600"/>
-              </a:spcAft>
-              <a:defRPr sz="1400">
+                <a:spcPts val="1000"/>
+              </a:spcAft>
+              <a:defRPr sz="1100">
                 <a:solidFill>
                   <a:srgbClr val="666666"/>
                 </a:solidFill>
@@ -5357,15 +5380,15 @@
               </a:defRPr>
             </a:pPr>
             <a:r>
-              <a:t>        每题解析 + 留言提问</a:t>
+              <a:t>     每题解析 + 留言提问</a:t>
             </a:r>
           </a:p>
           <a:p>
             <a:pPr>
               <a:spcAft>
-                <a:spcPts val="400"/>
-              </a:spcAft>
-              <a:defRPr sz="2200" b="1">
+                <a:spcPts val="200"/>
+              </a:spcAft>
+              <a:defRPr sz="1600" b="1">
                 <a:solidFill>
                   <a:srgbClr val="003366"/>
                 </a:solidFill>
@@ -5373,15 +5396,15 @@
               </a:defRPr>
             </a:pPr>
             <a:r>
-              <a:t>08    后续计划</a:t>
+              <a:t>08  后续计划</a:t>
             </a:r>
           </a:p>
           <a:p>
             <a:pPr>
               <a:spcAft>
-                <a:spcPts val="1600"/>
-              </a:spcAft>
-              <a:defRPr sz="1400">
+                <a:spcPts val="1000"/>
+              </a:spcAft>
+              <a:defRPr sz="1100">
                 <a:solidFill>
                   <a:srgbClr val="666666"/>
                 </a:solidFill>
@@ -5389,20 +5412,20 @@
               </a:defRPr>
             </a:pPr>
             <a:r>
-              <a:t>        Week 3 将完成 UI/UX、测试、文档整理</a:t>
-            </a:r>
-          </a:p>
-        </p:txBody>
-      </p:sp>
-      <p:sp>
-        <p:nvSpPr>
-          <p:cNvPr id="8" name="Rectangle 7"/>
+              <a:t>     Week 3 将完成 UI/UX、测试、文档整理</a:t>
+            </a:r>
+          </a:p>
+        </p:txBody>
+      </p:sp>
+      <p:sp>
+        <p:nvSpPr>
+          <p:cNvPr id="9" name="Rectangle 8"/>
           <p:cNvSpPr/>
           <p:nvPr/>
         </p:nvSpPr>
         <p:spPr>
           <a:xfrm>
-            <a:off x="512064" y="6400800"/>
+            <a:off x="512064" y="6528816"/>
             <a:ext cx="11167567" cy="12700"/>
           </a:xfrm>
           <a:prstGeom prst="rect">
@@ -5439,13 +5462,13 @@
       </p:sp>
       <p:sp>
         <p:nvSpPr>
-          <p:cNvPr id="9" name="TextBox 8"/>
+          <p:cNvPr id="10" name="TextBox 9"/>
           <p:cNvSpPr txBox="1"/>
           <p:nvPr/>
         </p:nvSpPr>
         <p:spPr>
           <a:xfrm>
-            <a:off x="10948111" y="6492240"/>
+            <a:off x="10948111" y="6620256"/>
             <a:ext cx="731520" cy="274320"/>
           </a:xfrm>
           <a:prstGeom prst="rect">
@@ -5500,7 +5523,7 @@
         <p:spPr>
           <a:xfrm>
             <a:off x="0" y="0"/>
-            <a:ext cx="12191695" cy="886968"/>
+            <a:ext cx="12191695" cy="658368"/>
           </a:xfrm>
           <a:prstGeom prst="rect">
             <a:avLst/>
@@ -5543,7 +5566,7 @@
         <p:spPr>
           <a:xfrm>
             <a:off x="0" y="0"/>
-            <a:ext cx="54864" cy="886968"/>
+            <a:ext cx="54864" cy="658368"/>
           </a:xfrm>
           <a:prstGeom prst="rect">
             <a:avLst/>
@@ -5585,7 +5608,7 @@
         </p:nvSpPr>
         <p:spPr>
           <a:xfrm>
-            <a:off x="10308031" y="283464"/>
+            <a:off x="10308031" y="169164"/>
             <a:ext cx="1371600" cy="320040"/>
           </a:xfrm>
           <a:prstGeom prst="roundRect">
@@ -5644,7 +5667,7 @@
         </p:nvSpPr>
         <p:spPr>
           <a:xfrm>
-            <a:off x="603504" y="260604"/>
+            <a:off x="603504" y="146304"/>
             <a:ext cx="9613087" cy="457200"/>
           </a:xfrm>
           <a:prstGeom prst="rect">
@@ -5659,7 +5682,7 @@
           <a:lstStyle/>
           <a:p>
             <a:pPr>
-              <a:defRPr sz="2400" b="1">
+              <a:defRPr sz="2000" b="1">
                 <a:solidFill>
                   <a:srgbClr val="FFFFFF"/>
                 </a:solidFill>
@@ -5680,8 +5703,8 @@
         </p:nvSpPr>
         <p:spPr>
           <a:xfrm>
-            <a:off x="512064" y="1508760"/>
-            <a:ext cx="2620441" cy="1463040"/>
+            <a:off x="512064" y="1033272"/>
+            <a:ext cx="2654731" cy="1143000"/>
           </a:xfrm>
           <a:prstGeom prst="roundRect">
             <a:avLst/>
@@ -5713,38 +5736,38 @@
           <a:p>
             <a:pPr algn="ctr">
               <a:spcAft>
+                <a:spcPts val="200"/>
+              </a:spcAft>
+              <a:defRPr sz="3000" b="1">
+                <a:solidFill>
+                  <a:srgbClr val="0066CC"/>
+                </a:solidFill>
+                <a:latin typeface="Microsoft YaHei"/>
+              </a:defRPr>
+            </a:pPr>
+            <a:r>
+              <a:t>11</a:t>
+            </a:r>
+          </a:p>
+          <a:p>
+            <a:pPr algn="ctr">
+              <a:spcAft>
                 <a:spcPts val="400"/>
               </a:spcAft>
-              <a:defRPr sz="3600" b="1">
-                <a:solidFill>
-                  <a:srgbClr val="0066CC"/>
-                </a:solidFill>
-                <a:latin typeface="Microsoft YaHei"/>
-              </a:defRPr>
-            </a:pPr>
-            <a:r>
-              <a:t>11</a:t>
+              <a:defRPr sz="1100">
+                <a:solidFill>
+                  <a:srgbClr val="666666"/>
+                </a:solidFill>
+                <a:latin typeface="Microsoft YaHei"/>
+              </a:defRPr>
+            </a:pPr>
+            <a:r>
+              <a:t>次</a:t>
             </a:r>
           </a:p>
           <a:p>
             <a:pPr algn="ctr">
-              <a:spcAft>
-                <a:spcPts val="800"/>
-              </a:spcAft>
-              <a:defRPr sz="1400">
-                <a:solidFill>
-                  <a:srgbClr val="666666"/>
-                </a:solidFill>
-                <a:latin typeface="Microsoft YaHei"/>
-              </a:defRPr>
-            </a:pPr>
-            <a:r>
-              <a:t>次</a:t>
-            </a:r>
-          </a:p>
-          <a:p>
-            <a:pPr algn="ctr">
-              <a:defRPr sz="1400">
+              <a:defRPr sz="1100">
                 <a:solidFill>
                   <a:srgbClr val="333333"/>
                 </a:solidFill>
@@ -5765,8 +5788,8 @@
         </p:nvSpPr>
         <p:spPr>
           <a:xfrm>
-            <a:off x="3361105" y="1508760"/>
-            <a:ext cx="2620441" cy="1463040"/>
+            <a:off x="3349675" y="1033272"/>
+            <a:ext cx="2654731" cy="1143000"/>
           </a:xfrm>
           <a:prstGeom prst="roundRect">
             <a:avLst/>
@@ -5798,38 +5821,38 @@
           <a:p>
             <a:pPr algn="ctr">
               <a:spcAft>
+                <a:spcPts val="200"/>
+              </a:spcAft>
+              <a:defRPr sz="3000" b="1">
+                <a:solidFill>
+                  <a:srgbClr val="0066CC"/>
+                </a:solidFill>
+                <a:latin typeface="Microsoft YaHei"/>
+              </a:defRPr>
+            </a:pPr>
+            <a:r>
+              <a:t>32</a:t>
+            </a:r>
+          </a:p>
+          <a:p>
+            <a:pPr algn="ctr">
+              <a:spcAft>
                 <a:spcPts val="400"/>
               </a:spcAft>
-              <a:defRPr sz="3600" b="1">
-                <a:solidFill>
-                  <a:srgbClr val="0066CC"/>
-                </a:solidFill>
-                <a:latin typeface="Microsoft YaHei"/>
-              </a:defRPr>
-            </a:pPr>
-            <a:r>
-              <a:t>32</a:t>
+              <a:defRPr sz="1100">
+                <a:solidFill>
+                  <a:srgbClr val="666666"/>
+                </a:solidFill>
+                <a:latin typeface="Microsoft YaHei"/>
+              </a:defRPr>
+            </a:pPr>
+            <a:r>
+              <a:t>个</a:t>
             </a:r>
           </a:p>
           <a:p>
             <a:pPr algn="ctr">
-              <a:spcAft>
-                <a:spcPts val="800"/>
-              </a:spcAft>
-              <a:defRPr sz="1400">
-                <a:solidFill>
-                  <a:srgbClr val="666666"/>
-                </a:solidFill>
-                <a:latin typeface="Microsoft YaHei"/>
-              </a:defRPr>
-            </a:pPr>
-            <a:r>
-              <a:t>个</a:t>
-            </a:r>
-          </a:p>
-          <a:p>
-            <a:pPr algn="ctr">
-              <a:defRPr sz="1400">
+              <a:defRPr sz="1100">
                 <a:solidFill>
                   <a:srgbClr val="333333"/>
                 </a:solidFill>
@@ -5850,8 +5873,8 @@
         </p:nvSpPr>
         <p:spPr>
           <a:xfrm>
-            <a:off x="6210147" y="1508760"/>
-            <a:ext cx="2620441" cy="1463040"/>
+            <a:off x="6187287" y="1033272"/>
+            <a:ext cx="2654731" cy="1143000"/>
           </a:xfrm>
           <a:prstGeom prst="roundRect">
             <a:avLst/>
@@ -5883,38 +5906,38 @@
           <a:p>
             <a:pPr algn="ctr">
               <a:spcAft>
+                <a:spcPts val="200"/>
+              </a:spcAft>
+              <a:defRPr sz="3000" b="1">
+                <a:solidFill>
+                  <a:srgbClr val="0066CC"/>
+                </a:solidFill>
+                <a:latin typeface="Microsoft YaHei"/>
+              </a:defRPr>
+            </a:pPr>
+            <a:r>
+              <a:t>12</a:t>
+            </a:r>
+          </a:p>
+          <a:p>
+            <a:pPr algn="ctr">
+              <a:spcAft>
                 <a:spcPts val="400"/>
               </a:spcAft>
-              <a:defRPr sz="3600" b="1">
-                <a:solidFill>
-                  <a:srgbClr val="0066CC"/>
-                </a:solidFill>
-                <a:latin typeface="Microsoft YaHei"/>
-              </a:defRPr>
-            </a:pPr>
-            <a:r>
-              <a:t>12</a:t>
+              <a:defRPr sz="1100">
+                <a:solidFill>
+                  <a:srgbClr val="666666"/>
+                </a:solidFill>
+                <a:latin typeface="Microsoft YaHei"/>
+              </a:defRPr>
+            </a:pPr>
+            <a:r>
+              <a:t>张</a:t>
             </a:r>
           </a:p>
           <a:p>
             <a:pPr algn="ctr">
-              <a:spcAft>
-                <a:spcPts val="800"/>
-              </a:spcAft>
-              <a:defRPr sz="1400">
-                <a:solidFill>
-                  <a:srgbClr val="666666"/>
-                </a:solidFill>
-                <a:latin typeface="Microsoft YaHei"/>
-              </a:defRPr>
-            </a:pPr>
-            <a:r>
-              <a:t>张</a:t>
-            </a:r>
-          </a:p>
-          <a:p>
-            <a:pPr algn="ctr">
-              <a:defRPr sz="1400">
+              <a:defRPr sz="1100">
                 <a:solidFill>
                   <a:srgbClr val="333333"/>
                 </a:solidFill>
@@ -5935,8 +5958,8 @@
         </p:nvSpPr>
         <p:spPr>
           <a:xfrm>
-            <a:off x="9059189" y="1508760"/>
-            <a:ext cx="2620441" cy="1463040"/>
+            <a:off x="9024899" y="1033272"/>
+            <a:ext cx="2654731" cy="1143000"/>
           </a:xfrm>
           <a:prstGeom prst="roundRect">
             <a:avLst/>
@@ -5968,38 +5991,38 @@
           <a:p>
             <a:pPr algn="ctr">
               <a:spcAft>
+                <a:spcPts val="200"/>
+              </a:spcAft>
+              <a:defRPr sz="3000" b="1">
+                <a:solidFill>
+                  <a:srgbClr val="0066CC"/>
+                </a:solidFill>
+                <a:latin typeface="Microsoft YaHei"/>
+              </a:defRPr>
+            </a:pPr>
+            <a:r>
+              <a:t>23</a:t>
+            </a:r>
+          </a:p>
+          <a:p>
+            <a:pPr algn="ctr">
+              <a:spcAft>
                 <a:spcPts val="400"/>
               </a:spcAft>
-              <a:defRPr sz="3600" b="1">
-                <a:solidFill>
-                  <a:srgbClr val="0066CC"/>
-                </a:solidFill>
-                <a:latin typeface="Microsoft YaHei"/>
-              </a:defRPr>
-            </a:pPr>
-            <a:r>
-              <a:t>23</a:t>
+              <a:defRPr sz="1100">
+                <a:solidFill>
+                  <a:srgbClr val="666666"/>
+                </a:solidFill>
+                <a:latin typeface="Microsoft YaHei"/>
+              </a:defRPr>
+            </a:pPr>
+            <a:r>
+              <a:t>条</a:t>
             </a:r>
           </a:p>
           <a:p>
             <a:pPr algn="ctr">
-              <a:spcAft>
-                <a:spcPts val="800"/>
-              </a:spcAft>
-              <a:defRPr sz="1400">
-                <a:solidFill>
-                  <a:srgbClr val="666666"/>
-                </a:solidFill>
-                <a:latin typeface="Microsoft YaHei"/>
-              </a:defRPr>
-            </a:pPr>
-            <a:r>
-              <a:t>条</a:t>
-            </a:r>
-          </a:p>
-          <a:p>
-            <a:pPr algn="ctr">
-              <a:defRPr sz="1400">
+              <a:defRPr sz="1100">
                 <a:solidFill>
                   <a:srgbClr val="333333"/>
                 </a:solidFill>
@@ -6020,8 +6043,8 @@
         </p:nvSpPr>
         <p:spPr>
           <a:xfrm>
-            <a:off x="512064" y="3154680"/>
-            <a:ext cx="11167567" cy="3008376"/>
+            <a:off x="512064" y="2496312"/>
+            <a:ext cx="11167567" cy="3877056"/>
           </a:xfrm>
           <a:prstGeom prst="rect">
             <a:avLst/>
@@ -6036,12 +6059,12 @@
           <a:p>
             <a:pPr>
               <a:lnSpc>
-                <a:spcPct val="130000"/>
+                <a:spcPct val="110000"/>
               </a:lnSpc>
               <a:spcAft>
-                <a:spcPts val="1000"/>
-              </a:spcAft>
-              <a:defRPr sz="1800">
+                <a:spcPts val="400"/>
+              </a:spcAft>
+              <a:defRPr sz="1700">
                 <a:solidFill>
                   <a:srgbClr val="333333"/>
                 </a:solidFill>
@@ -6055,12 +6078,12 @@
           <a:p>
             <a:pPr>
               <a:lnSpc>
-                <a:spcPct val="130000"/>
+                <a:spcPct val="110000"/>
               </a:lnSpc>
               <a:spcAft>
-                <a:spcPts val="1000"/>
-              </a:spcAft>
-              <a:defRPr sz="1800">
+                <a:spcPts val="400"/>
+              </a:spcAft>
+              <a:defRPr sz="1700">
                 <a:solidFill>
                   <a:srgbClr val="333333"/>
                 </a:solidFill>
@@ -6074,12 +6097,12 @@
           <a:p>
             <a:pPr>
               <a:lnSpc>
-                <a:spcPct val="130000"/>
+                <a:spcPct val="110000"/>
               </a:lnSpc>
               <a:spcAft>
-                <a:spcPts val="1000"/>
-              </a:spcAft>
-              <a:defRPr sz="1800">
+                <a:spcPts val="400"/>
+              </a:spcAft>
+              <a:defRPr sz="1700">
                 <a:solidFill>
                   <a:srgbClr val="333333"/>
                 </a:solidFill>
@@ -6093,12 +6116,12 @@
           <a:p>
             <a:pPr>
               <a:lnSpc>
-                <a:spcPct val="130000"/>
+                <a:spcPct val="110000"/>
               </a:lnSpc>
               <a:spcAft>
-                <a:spcPts val="1000"/>
-              </a:spcAft>
-              <a:defRPr sz="1800">
+                <a:spcPts val="400"/>
+              </a:spcAft>
+              <a:defRPr sz="1700">
                 <a:solidFill>
                   <a:srgbClr val="333333"/>
                 </a:solidFill>
@@ -6119,7 +6142,7 @@
         </p:nvSpPr>
         <p:spPr>
           <a:xfrm>
-            <a:off x="512064" y="6400800"/>
+            <a:off x="512064" y="6528816"/>
             <a:ext cx="11167567" cy="12700"/>
           </a:xfrm>
           <a:prstGeom prst="rect">
@@ -6162,7 +6185,7 @@
         </p:nvSpPr>
         <p:spPr>
           <a:xfrm>
-            <a:off x="10948111" y="6492240"/>
+            <a:off x="10948111" y="6620256"/>
             <a:ext cx="731520" cy="274320"/>
           </a:xfrm>
           <a:prstGeom prst="rect">
@@ -6217,7 +6240,7 @@
         <p:spPr>
           <a:xfrm>
             <a:off x="0" y="0"/>
-            <a:ext cx="12191695" cy="886968"/>
+            <a:ext cx="12191695" cy="658368"/>
           </a:xfrm>
           <a:prstGeom prst="rect">
             <a:avLst/>
@@ -6260,7 +6283,7 @@
         <p:spPr>
           <a:xfrm>
             <a:off x="0" y="0"/>
-            <a:ext cx="54864" cy="886968"/>
+            <a:ext cx="54864" cy="658368"/>
           </a:xfrm>
           <a:prstGeom prst="rect">
             <a:avLst/>
@@ -6302,7 +6325,7 @@
         </p:nvSpPr>
         <p:spPr>
           <a:xfrm>
-            <a:off x="10308031" y="283464"/>
+            <a:off x="10308031" y="169164"/>
             <a:ext cx="1371600" cy="320040"/>
           </a:xfrm>
           <a:prstGeom prst="roundRect">
@@ -6361,7 +6384,7 @@
         </p:nvSpPr>
         <p:spPr>
           <a:xfrm>
-            <a:off x="603504" y="260604"/>
+            <a:off x="603504" y="146304"/>
             <a:ext cx="9613087" cy="457200"/>
           </a:xfrm>
           <a:prstGeom prst="rect">
@@ -6376,7 +6399,7 @@
           <a:lstStyle/>
           <a:p>
             <a:pPr>
-              <a:defRPr sz="2400" b="1">
+              <a:defRPr sz="2000" b="1">
                 <a:solidFill>
                   <a:srgbClr val="FFFFFF"/>
                 </a:solidFill>
@@ -6397,8 +6420,8 @@
         </p:nvSpPr>
         <p:spPr>
           <a:xfrm>
-            <a:off x="512064" y="1508760"/>
-            <a:ext cx="2620441" cy="1463040"/>
+            <a:off x="512064" y="1033272"/>
+            <a:ext cx="2654731" cy="1143000"/>
           </a:xfrm>
           <a:prstGeom prst="roundRect">
             <a:avLst/>
@@ -6430,38 +6453,38 @@
           <a:p>
             <a:pPr algn="ctr">
               <a:spcAft>
+                <a:spcPts val="200"/>
+              </a:spcAft>
+              <a:defRPr sz="3000" b="1">
+                <a:solidFill>
+                  <a:srgbClr val="0066CC"/>
+                </a:solidFill>
+                <a:latin typeface="Microsoft YaHei"/>
+              </a:defRPr>
+            </a:pPr>
+            <a:r>
+              <a:t>200</a:t>
+            </a:r>
+          </a:p>
+          <a:p>
+            <a:pPr algn="ctr">
+              <a:spcAft>
                 <a:spcPts val="400"/>
               </a:spcAft>
-              <a:defRPr sz="3600" b="1">
-                <a:solidFill>
-                  <a:srgbClr val="0066CC"/>
-                </a:solidFill>
-                <a:latin typeface="Microsoft YaHei"/>
-              </a:defRPr>
-            </a:pPr>
-            <a:r>
-              <a:t>200</a:t>
+              <a:defRPr sz="1100">
+                <a:solidFill>
+                  <a:srgbClr val="666666"/>
+                </a:solidFill>
+                <a:latin typeface="Microsoft YaHei"/>
+              </a:defRPr>
+            </a:pPr>
+            <a:r>
+              <a:t>道</a:t>
             </a:r>
           </a:p>
           <a:p>
             <a:pPr algn="ctr">
-              <a:spcAft>
-                <a:spcPts val="800"/>
-              </a:spcAft>
-              <a:defRPr sz="1400">
-                <a:solidFill>
-                  <a:srgbClr val="666666"/>
-                </a:solidFill>
-                <a:latin typeface="Microsoft YaHei"/>
-              </a:defRPr>
-            </a:pPr>
-            <a:r>
-              <a:t>道</a:t>
-            </a:r>
-          </a:p>
-          <a:p>
-            <a:pPr algn="ctr">
-              <a:defRPr sz="1400">
+              <a:defRPr sz="1100">
                 <a:solidFill>
                   <a:srgbClr val="333333"/>
                 </a:solidFill>
@@ -6482,8 +6505,8 @@
         </p:nvSpPr>
         <p:spPr>
           <a:xfrm>
-            <a:off x="3361105" y="1508760"/>
-            <a:ext cx="2620441" cy="1463040"/>
+            <a:off x="3349675" y="1033272"/>
+            <a:ext cx="2654731" cy="1143000"/>
           </a:xfrm>
           <a:prstGeom prst="roundRect">
             <a:avLst/>
@@ -6515,38 +6538,38 @@
           <a:p>
             <a:pPr algn="ctr">
               <a:spcAft>
+                <a:spcPts val="200"/>
+              </a:spcAft>
+              <a:defRPr sz="3000" b="1">
+                <a:solidFill>
+                  <a:srgbClr val="0066CC"/>
+                </a:solidFill>
+                <a:latin typeface="Microsoft YaHei"/>
+              </a:defRPr>
+            </a:pPr>
+            <a:r>
+              <a:t>6</a:t>
+            </a:r>
+          </a:p>
+          <a:p>
+            <a:pPr algn="ctr">
+              <a:spcAft>
                 <a:spcPts val="400"/>
               </a:spcAft>
-              <a:defRPr sz="3600" b="1">
-                <a:solidFill>
-                  <a:srgbClr val="0066CC"/>
-                </a:solidFill>
-                <a:latin typeface="Microsoft YaHei"/>
-              </a:defRPr>
-            </a:pPr>
-            <a:r>
-              <a:t>6</a:t>
+              <a:defRPr sz="1100">
+                <a:solidFill>
+                  <a:srgbClr val="666666"/>
+                </a:solidFill>
+                <a:latin typeface="Microsoft YaHei"/>
+              </a:defRPr>
+            </a:pPr>
+            <a:r>
+              <a:t>个</a:t>
             </a:r>
           </a:p>
           <a:p>
             <a:pPr algn="ctr">
-              <a:spcAft>
-                <a:spcPts val="800"/>
-              </a:spcAft>
-              <a:defRPr sz="1400">
-                <a:solidFill>
-                  <a:srgbClr val="666666"/>
-                </a:solidFill>
-                <a:latin typeface="Microsoft YaHei"/>
-              </a:defRPr>
-            </a:pPr>
-            <a:r>
-              <a:t>个</a:t>
-            </a:r>
-          </a:p>
-          <a:p>
-            <a:pPr algn="ctr">
-              <a:defRPr sz="1400">
+              <a:defRPr sz="1100">
                 <a:solidFill>
                   <a:srgbClr val="333333"/>
                 </a:solidFill>
@@ -6567,8 +6590,8 @@
         </p:nvSpPr>
         <p:spPr>
           <a:xfrm>
-            <a:off x="6210147" y="1508760"/>
-            <a:ext cx="2620441" cy="1463040"/>
+            <a:off x="6187287" y="1033272"/>
+            <a:ext cx="2654731" cy="1143000"/>
           </a:xfrm>
           <a:prstGeom prst="roundRect">
             <a:avLst/>
@@ -6600,38 +6623,38 @@
           <a:p>
             <a:pPr algn="ctr">
               <a:spcAft>
+                <a:spcPts val="200"/>
+              </a:spcAft>
+              <a:defRPr sz="3000" b="1">
+                <a:solidFill>
+                  <a:srgbClr val="0066CC"/>
+                </a:solidFill>
+                <a:latin typeface="Microsoft YaHei"/>
+              </a:defRPr>
+            </a:pPr>
+            <a:r>
+              <a:t>8</a:t>
+            </a:r>
+          </a:p>
+          <a:p>
+            <a:pPr algn="ctr">
+              <a:spcAft>
                 <a:spcPts val="400"/>
               </a:spcAft>
-              <a:defRPr sz="3600" b="1">
-                <a:solidFill>
-                  <a:srgbClr val="0066CC"/>
-                </a:solidFill>
-                <a:latin typeface="Microsoft YaHei"/>
-              </a:defRPr>
-            </a:pPr>
-            <a:r>
-              <a:t>8</a:t>
+              <a:defRPr sz="1100">
+                <a:solidFill>
+                  <a:srgbClr val="666666"/>
+                </a:solidFill>
+                <a:latin typeface="Microsoft YaHei"/>
+              </a:defRPr>
+            </a:pPr>
+            <a:r>
+              <a:t>个</a:t>
             </a:r>
           </a:p>
           <a:p>
             <a:pPr algn="ctr">
-              <a:spcAft>
-                <a:spcPts val="800"/>
-              </a:spcAft>
-              <a:defRPr sz="1400">
-                <a:solidFill>
-                  <a:srgbClr val="666666"/>
-                </a:solidFill>
-                <a:latin typeface="Microsoft YaHei"/>
-              </a:defRPr>
-            </a:pPr>
-            <a:r>
-              <a:t>个</a:t>
-            </a:r>
-          </a:p>
-          <a:p>
-            <a:pPr algn="ctr">
-              <a:defRPr sz="1400">
+              <a:defRPr sz="1100">
                 <a:solidFill>
                   <a:srgbClr val="333333"/>
                 </a:solidFill>
@@ -6652,8 +6675,8 @@
         </p:nvSpPr>
         <p:spPr>
           <a:xfrm>
-            <a:off x="9059189" y="1508760"/>
-            <a:ext cx="2620441" cy="1463040"/>
+            <a:off x="9024899" y="1033272"/>
+            <a:ext cx="2654731" cy="1143000"/>
           </a:xfrm>
           <a:prstGeom prst="roundRect">
             <a:avLst/>
@@ -6685,38 +6708,38 @@
           <a:p>
             <a:pPr algn="ctr">
               <a:spcAft>
+                <a:spcPts val="200"/>
+              </a:spcAft>
+              <a:defRPr sz="3000" b="1">
+                <a:solidFill>
+                  <a:srgbClr val="0066CC"/>
+                </a:solidFill>
+                <a:latin typeface="Microsoft YaHei"/>
+              </a:defRPr>
+            </a:pPr>
+            <a:r>
+              <a:t>≈75</a:t>
+            </a:r>
+          </a:p>
+          <a:p>
+            <a:pPr algn="ctr">
+              <a:spcAft>
                 <a:spcPts val="400"/>
               </a:spcAft>
-              <a:defRPr sz="3600" b="1">
-                <a:solidFill>
-                  <a:srgbClr val="0066CC"/>
-                </a:solidFill>
-                <a:latin typeface="Microsoft YaHei"/>
-              </a:defRPr>
-            </a:pPr>
-            <a:r>
-              <a:t>≈75</a:t>
+              <a:defRPr sz="1100">
+                <a:solidFill>
+                  <a:srgbClr val="666666"/>
+                </a:solidFill>
+                <a:latin typeface="Microsoft YaHei"/>
+              </a:defRPr>
+            </a:pPr>
+            <a:r>
+              <a:t>%</a:t>
             </a:r>
           </a:p>
           <a:p>
             <a:pPr algn="ctr">
-              <a:spcAft>
-                <a:spcPts val="800"/>
-              </a:spcAft>
-              <a:defRPr sz="1400">
-                <a:solidFill>
-                  <a:srgbClr val="666666"/>
-                </a:solidFill>
-                <a:latin typeface="Microsoft YaHei"/>
-              </a:defRPr>
-            </a:pPr>
-            <a:r>
-              <a:t>%</a:t>
-            </a:r>
-          </a:p>
-          <a:p>
-            <a:pPr algn="ctr">
-              <a:defRPr sz="1400">
+              <a:defRPr sz="1100">
                 <a:solidFill>
                   <a:srgbClr val="333333"/>
                 </a:solidFill>
@@ -6737,8 +6760,8 @@
         </p:nvSpPr>
         <p:spPr>
           <a:xfrm>
-            <a:off x="512064" y="3154680"/>
-            <a:ext cx="11167567" cy="3008376"/>
+            <a:off x="512064" y="2496312"/>
+            <a:ext cx="11167567" cy="3877056"/>
           </a:xfrm>
           <a:prstGeom prst="rect">
             <a:avLst/>
@@ -6753,12 +6776,12 @@
           <a:p>
             <a:pPr>
               <a:lnSpc>
-                <a:spcPct val="130000"/>
+                <a:spcPct val="110000"/>
               </a:lnSpc>
               <a:spcAft>
-                <a:spcPts val="1000"/>
-              </a:spcAft>
-              <a:defRPr sz="1800">
+                <a:spcPts val="400"/>
+              </a:spcAft>
+              <a:defRPr sz="1700">
                 <a:solidFill>
                   <a:srgbClr val="333333"/>
                 </a:solidFill>
@@ -6772,12 +6795,12 @@
           <a:p>
             <a:pPr>
               <a:lnSpc>
-                <a:spcPct val="130000"/>
+                <a:spcPct val="110000"/>
               </a:lnSpc>
               <a:spcAft>
-                <a:spcPts val="1000"/>
-              </a:spcAft>
-              <a:defRPr sz="1800">
+                <a:spcPts val="400"/>
+              </a:spcAft>
+              <a:defRPr sz="1700">
                 <a:solidFill>
                   <a:srgbClr val="333333"/>
                 </a:solidFill>
@@ -6791,12 +6814,12 @@
           <a:p>
             <a:pPr>
               <a:lnSpc>
-                <a:spcPct val="130000"/>
+                <a:spcPct val="110000"/>
               </a:lnSpc>
               <a:spcAft>
-                <a:spcPts val="1000"/>
-              </a:spcAft>
-              <a:defRPr sz="1800">
+                <a:spcPts val="400"/>
+              </a:spcAft>
+              <a:defRPr sz="1700">
                 <a:solidFill>
                   <a:srgbClr val="333333"/>
                 </a:solidFill>
@@ -6810,12 +6833,12 @@
           <a:p>
             <a:pPr>
               <a:lnSpc>
-                <a:spcPct val="130000"/>
+                <a:spcPct val="110000"/>
               </a:lnSpc>
               <a:spcAft>
-                <a:spcPts val="1000"/>
-              </a:spcAft>
-              <a:defRPr sz="1800">
+                <a:spcPts val="400"/>
+              </a:spcAft>
+              <a:defRPr sz="1700">
                 <a:solidFill>
                   <a:srgbClr val="333333"/>
                 </a:solidFill>
@@ -6829,12 +6852,12 @@
           <a:p>
             <a:pPr>
               <a:lnSpc>
-                <a:spcPct val="130000"/>
+                <a:spcPct val="110000"/>
               </a:lnSpc>
               <a:spcAft>
-                <a:spcPts val="1000"/>
-              </a:spcAft>
-              <a:defRPr sz="1800">
+                <a:spcPts val="400"/>
+              </a:spcAft>
+              <a:defRPr sz="1700">
                 <a:solidFill>
                   <a:srgbClr val="333333"/>
                 </a:solidFill>
@@ -6855,7 +6878,7 @@
         </p:nvSpPr>
         <p:spPr>
           <a:xfrm>
-            <a:off x="512064" y="6400800"/>
+            <a:off x="512064" y="6528816"/>
             <a:ext cx="11167567" cy="12700"/>
           </a:xfrm>
           <a:prstGeom prst="rect">
@@ -6898,7 +6921,7 @@
         </p:nvSpPr>
         <p:spPr>
           <a:xfrm>
-            <a:off x="10948111" y="6492240"/>
+            <a:off x="10948111" y="6620256"/>
             <a:ext cx="731520" cy="274320"/>
           </a:xfrm>
           <a:prstGeom prst="rect">
@@ -6953,7 +6976,7 @@
         <p:spPr>
           <a:xfrm>
             <a:off x="0" y="0"/>
-            <a:ext cx="12191695" cy="886968"/>
+            <a:ext cx="12191695" cy="658368"/>
           </a:xfrm>
           <a:prstGeom prst="rect">
             <a:avLst/>
@@ -6996,7 +7019,7 @@
         <p:spPr>
           <a:xfrm>
             <a:off x="0" y="0"/>
-            <a:ext cx="54864" cy="886968"/>
+            <a:ext cx="54864" cy="658368"/>
           </a:xfrm>
           <a:prstGeom prst="rect">
             <a:avLst/>
@@ -7038,7 +7061,7 @@
         </p:nvSpPr>
         <p:spPr>
           <a:xfrm>
-            <a:off x="10308031" y="283464"/>
+            <a:off x="10308031" y="169164"/>
             <a:ext cx="1371600" cy="320040"/>
           </a:xfrm>
           <a:prstGeom prst="roundRect">
@@ -7097,7 +7120,7 @@
         </p:nvSpPr>
         <p:spPr>
           <a:xfrm>
-            <a:off x="603504" y="260604"/>
+            <a:off x="603504" y="146304"/>
             <a:ext cx="9613087" cy="457200"/>
           </a:xfrm>
           <a:prstGeom prst="rect">
@@ -7112,7 +7135,7 @@
           <a:lstStyle/>
           <a:p>
             <a:pPr>
-              <a:defRPr sz="2400" b="1">
+              <a:defRPr sz="2000" b="1">
                 <a:solidFill>
                   <a:srgbClr val="FFFFFF"/>
                 </a:solidFill>
@@ -7133,8 +7156,8 @@
         </p:nvSpPr>
         <p:spPr>
           <a:xfrm>
-            <a:off x="512064" y="1325880"/>
-            <a:ext cx="5400903" cy="411480"/>
+            <a:off x="512064" y="941832"/>
+            <a:ext cx="5400903" cy="347472"/>
           </a:xfrm>
           <a:prstGeom prst="roundRect">
             <a:avLst/>
@@ -7168,9 +7191,9 @@
           <a:p>
             <a:pPr algn="ctr">
               <a:spcAft>
-                <a:spcPts val="800"/>
-              </a:spcAft>
-              <a:defRPr sz="2000" b="1">
+                <a:spcPts val="400"/>
+              </a:spcAft>
+              <a:defRPr sz="1600" b="1">
                 <a:solidFill>
                   <a:srgbClr val="003366"/>
                 </a:solidFill>
@@ -7191,8 +7214,8 @@
         </p:nvSpPr>
         <p:spPr>
           <a:xfrm>
-            <a:off x="512064" y="1874520"/>
-            <a:ext cx="5400903" cy="4471416"/>
+            <a:off x="512064" y="1371600"/>
+            <a:ext cx="5400903" cy="5065776"/>
           </a:xfrm>
           <a:prstGeom prst="rect">
             <a:avLst/>
@@ -7207,12 +7230,12 @@
           <a:p>
             <a:pPr>
               <a:lnSpc>
-                <a:spcPct val="130000"/>
+                <a:spcPct val="110000"/>
               </a:lnSpc>
               <a:spcAft>
-                <a:spcPts val="1000"/>
-              </a:spcAft>
-              <a:defRPr sz="1600">
+                <a:spcPts val="400"/>
+              </a:spcAft>
+              <a:defRPr sz="1400">
                 <a:solidFill>
                   <a:srgbClr val="333333"/>
                 </a:solidFill>
@@ -7226,12 +7249,12 @@
           <a:p>
             <a:pPr>
               <a:lnSpc>
-                <a:spcPct val="130000"/>
+                <a:spcPct val="110000"/>
               </a:lnSpc>
               <a:spcAft>
-                <a:spcPts val="1000"/>
-              </a:spcAft>
-              <a:defRPr sz="1600">
+                <a:spcPts val="400"/>
+              </a:spcAft>
+              <a:defRPr sz="1400">
                 <a:solidFill>
                   <a:srgbClr val="333333"/>
                 </a:solidFill>
@@ -7245,12 +7268,12 @@
           <a:p>
             <a:pPr>
               <a:lnSpc>
-                <a:spcPct val="130000"/>
+                <a:spcPct val="110000"/>
               </a:lnSpc>
               <a:spcAft>
-                <a:spcPts val="1000"/>
-              </a:spcAft>
-              <a:defRPr sz="1600">
+                <a:spcPts val="400"/>
+              </a:spcAft>
+              <a:defRPr sz="1400">
                 <a:solidFill>
                   <a:srgbClr val="333333"/>
                 </a:solidFill>
@@ -7264,12 +7287,12 @@
           <a:p>
             <a:pPr>
               <a:lnSpc>
-                <a:spcPct val="130000"/>
+                <a:spcPct val="110000"/>
               </a:lnSpc>
               <a:spcAft>
-                <a:spcPts val="1000"/>
-              </a:spcAft>
-              <a:defRPr sz="1600">
+                <a:spcPts val="400"/>
+              </a:spcAft>
+              <a:defRPr sz="1400">
                 <a:solidFill>
                   <a:srgbClr val="333333"/>
                 </a:solidFill>
@@ -7290,8 +7313,8 @@
         </p:nvSpPr>
         <p:spPr>
           <a:xfrm>
-            <a:off x="6278727" y="1325880"/>
-            <a:ext cx="5400903" cy="411480"/>
+            <a:off x="6278727" y="941832"/>
+            <a:ext cx="5400903" cy="347472"/>
           </a:xfrm>
           <a:prstGeom prst="roundRect">
             <a:avLst/>
@@ -7325,9 +7348,9 @@
           <a:p>
             <a:pPr algn="ctr">
               <a:spcAft>
-                <a:spcPts val="800"/>
-              </a:spcAft>
-              <a:defRPr sz="2000" b="1">
+                <a:spcPts val="400"/>
+              </a:spcAft>
+              <a:defRPr sz="1600" b="1">
                 <a:solidFill>
                   <a:srgbClr val="003366"/>
                 </a:solidFill>
@@ -7348,8 +7371,8 @@
         </p:nvSpPr>
         <p:spPr>
           <a:xfrm>
-            <a:off x="6278727" y="1874520"/>
-            <a:ext cx="5400903" cy="4471416"/>
+            <a:off x="6278727" y="1371600"/>
+            <a:ext cx="5400903" cy="5065776"/>
           </a:xfrm>
           <a:prstGeom prst="rect">
             <a:avLst/>
@@ -7364,12 +7387,12 @@
           <a:p>
             <a:pPr>
               <a:lnSpc>
-                <a:spcPct val="130000"/>
+                <a:spcPct val="110000"/>
               </a:lnSpc>
               <a:spcAft>
-                <a:spcPts val="1000"/>
-              </a:spcAft>
-              <a:defRPr sz="1600">
+                <a:spcPts val="400"/>
+              </a:spcAft>
+              <a:defRPr sz="1400">
                 <a:solidFill>
                   <a:srgbClr val="333333"/>
                 </a:solidFill>
@@ -7383,12 +7406,12 @@
           <a:p>
             <a:pPr>
               <a:lnSpc>
-                <a:spcPct val="130000"/>
+                <a:spcPct val="110000"/>
               </a:lnSpc>
               <a:spcAft>
-                <a:spcPts val="1000"/>
-              </a:spcAft>
-              <a:defRPr sz="1600">
+                <a:spcPts val="400"/>
+              </a:spcAft>
+              <a:defRPr sz="1400">
                 <a:solidFill>
                   <a:srgbClr val="333333"/>
                 </a:solidFill>
@@ -7402,12 +7425,12 @@
           <a:p>
             <a:pPr>
               <a:lnSpc>
-                <a:spcPct val="130000"/>
+                <a:spcPct val="110000"/>
               </a:lnSpc>
               <a:spcAft>
-                <a:spcPts val="1000"/>
-              </a:spcAft>
-              <a:defRPr sz="1600">
+                <a:spcPts val="400"/>
+              </a:spcAft>
+              <a:defRPr sz="1400">
                 <a:solidFill>
                   <a:srgbClr val="333333"/>
                 </a:solidFill>
@@ -7421,12 +7444,12 @@
           <a:p>
             <a:pPr>
               <a:lnSpc>
-                <a:spcPct val="130000"/>
+                <a:spcPct val="110000"/>
               </a:lnSpc>
               <a:spcAft>
-                <a:spcPts val="1000"/>
-              </a:spcAft>
-              <a:defRPr sz="1600">
+                <a:spcPts val="400"/>
+              </a:spcAft>
+              <a:defRPr sz="1400">
                 <a:solidFill>
                   <a:srgbClr val="333333"/>
                 </a:solidFill>
@@ -7447,7 +7470,7 @@
         </p:nvSpPr>
         <p:spPr>
           <a:xfrm>
-            <a:off x="512064" y="6400800"/>
+            <a:off x="512064" y="6528816"/>
             <a:ext cx="11167567" cy="12700"/>
           </a:xfrm>
           <a:prstGeom prst="rect">
@@ -7490,7 +7513,7 @@
         </p:nvSpPr>
         <p:spPr>
           <a:xfrm>
-            <a:off x="10948111" y="6492240"/>
+            <a:off x="10948111" y="6620256"/>
             <a:ext cx="731520" cy="274320"/>
           </a:xfrm>
           <a:prstGeom prst="rect">
@@ -7545,7 +7568,7 @@
         <p:spPr>
           <a:xfrm>
             <a:off x="0" y="0"/>
-            <a:ext cx="12191695" cy="886968"/>
+            <a:ext cx="12191695" cy="658368"/>
           </a:xfrm>
           <a:prstGeom prst="rect">
             <a:avLst/>
@@ -7588,7 +7611,7 @@
         <p:spPr>
           <a:xfrm>
             <a:off x="0" y="0"/>
-            <a:ext cx="54864" cy="886968"/>
+            <a:ext cx="54864" cy="658368"/>
           </a:xfrm>
           <a:prstGeom prst="rect">
             <a:avLst/>
@@ -7630,7 +7653,7 @@
         </p:nvSpPr>
         <p:spPr>
           <a:xfrm>
-            <a:off x="10308031" y="283464"/>
+            <a:off x="10308031" y="169164"/>
             <a:ext cx="1371600" cy="320040"/>
           </a:xfrm>
           <a:prstGeom prst="roundRect">
@@ -7689,7 +7712,7 @@
         </p:nvSpPr>
         <p:spPr>
           <a:xfrm>
-            <a:off x="603504" y="260604"/>
+            <a:off x="603504" y="146304"/>
             <a:ext cx="9613087" cy="457200"/>
           </a:xfrm>
           <a:prstGeom prst="rect">
@@ -7704,7 +7727,7 @@
           <a:lstStyle/>
           <a:p>
             <a:pPr>
-              <a:defRPr sz="2400" b="1">
+              <a:defRPr sz="2000" b="1">
                 <a:solidFill>
                   <a:srgbClr val="FFFFFF"/>
                 </a:solidFill>
@@ -7725,8 +7748,8 @@
         </p:nvSpPr>
         <p:spPr>
           <a:xfrm>
-            <a:off x="512064" y="1325880"/>
-            <a:ext cx="11167567" cy="4837176"/>
+            <a:off x="512064" y="941832"/>
+            <a:ext cx="11167567" cy="5431536"/>
           </a:xfrm>
           <a:prstGeom prst="rect">
             <a:avLst/>
@@ -7741,12 +7764,12 @@
           <a:p>
             <a:pPr>
               <a:lnSpc>
-                <a:spcPct val="130000"/>
+                <a:spcPct val="110000"/>
               </a:lnSpc>
               <a:spcAft>
-                <a:spcPts val="1000"/>
-              </a:spcAft>
-              <a:defRPr sz="2000">
+                <a:spcPts val="400"/>
+              </a:spcAft>
+              <a:defRPr sz="1700">
                 <a:solidFill>
                   <a:srgbClr val="333333"/>
                 </a:solidFill>
@@ -7760,12 +7783,12 @@
           <a:p>
             <a:pPr>
               <a:lnSpc>
-                <a:spcPct val="130000"/>
+                <a:spcPct val="110000"/>
               </a:lnSpc>
               <a:spcAft>
-                <a:spcPts val="1000"/>
-              </a:spcAft>
-              <a:defRPr sz="2000">
+                <a:spcPts val="400"/>
+              </a:spcAft>
+              <a:defRPr sz="1700">
                 <a:solidFill>
                   <a:srgbClr val="333333"/>
                 </a:solidFill>
@@ -7779,12 +7802,12 @@
           <a:p>
             <a:pPr>
               <a:lnSpc>
-                <a:spcPct val="130000"/>
+                <a:spcPct val="110000"/>
               </a:lnSpc>
               <a:spcAft>
-                <a:spcPts val="1000"/>
-              </a:spcAft>
-              <a:defRPr sz="2000">
+                <a:spcPts val="400"/>
+              </a:spcAft>
+              <a:defRPr sz="1700">
                 <a:solidFill>
                   <a:srgbClr val="333333"/>
                 </a:solidFill>
@@ -7798,12 +7821,12 @@
           <a:p>
             <a:pPr>
               <a:lnSpc>
-                <a:spcPct val="130000"/>
+                <a:spcPct val="110000"/>
               </a:lnSpc>
               <a:spcAft>
-                <a:spcPts val="1000"/>
-              </a:spcAft>
-              <a:defRPr sz="2000">
+                <a:spcPts val="400"/>
+              </a:spcAft>
+              <a:defRPr sz="1700">
                 <a:solidFill>
                   <a:srgbClr val="333333"/>
                 </a:solidFill>
@@ -7817,12 +7840,12 @@
           <a:p>
             <a:pPr>
               <a:lnSpc>
-                <a:spcPct val="130000"/>
+                <a:spcPct val="110000"/>
               </a:lnSpc>
               <a:spcAft>
-                <a:spcPts val="1000"/>
-              </a:spcAft>
-              <a:defRPr sz="2000">
+                <a:spcPts val="400"/>
+              </a:spcAft>
+              <a:defRPr sz="1700">
                 <a:solidFill>
                   <a:srgbClr val="333333"/>
                 </a:solidFill>
@@ -7843,7 +7866,7 @@
         </p:nvSpPr>
         <p:spPr>
           <a:xfrm>
-            <a:off x="512064" y="6400800"/>
+            <a:off x="512064" y="6528816"/>
             <a:ext cx="11167567" cy="12700"/>
           </a:xfrm>
           <a:prstGeom prst="rect">
@@ -7886,7 +7909,7 @@
         </p:nvSpPr>
         <p:spPr>
           <a:xfrm>
-            <a:off x="10948111" y="6492240"/>
+            <a:off x="10948111" y="6620256"/>
             <a:ext cx="731520" cy="274320"/>
           </a:xfrm>
           <a:prstGeom prst="rect">
@@ -7941,7 +7964,7 @@
         <p:spPr>
           <a:xfrm>
             <a:off x="0" y="0"/>
-            <a:ext cx="12191695" cy="886968"/>
+            <a:ext cx="12191695" cy="658368"/>
           </a:xfrm>
           <a:prstGeom prst="rect">
             <a:avLst/>
@@ -7984,7 +8007,7 @@
         <p:spPr>
           <a:xfrm>
             <a:off x="0" y="0"/>
-            <a:ext cx="54864" cy="886968"/>
+            <a:ext cx="54864" cy="658368"/>
           </a:xfrm>
           <a:prstGeom prst="rect">
             <a:avLst/>
@@ -8026,7 +8049,7 @@
         </p:nvSpPr>
         <p:spPr>
           <a:xfrm>
-            <a:off x="10308031" y="283464"/>
+            <a:off x="10308031" y="169164"/>
             <a:ext cx="1371600" cy="320040"/>
           </a:xfrm>
           <a:prstGeom prst="roundRect">
@@ -8085,7 +8108,7 @@
         </p:nvSpPr>
         <p:spPr>
           <a:xfrm>
-            <a:off x="603504" y="260604"/>
+            <a:off x="603504" y="146304"/>
             <a:ext cx="9613087" cy="457200"/>
           </a:xfrm>
           <a:prstGeom prst="rect">
@@ -8100,7 +8123,7 @@
           <a:lstStyle/>
           <a:p>
             <a:pPr>
-              <a:defRPr sz="2400" b="1">
+              <a:defRPr sz="2000" b="1">
                 <a:solidFill>
                   <a:srgbClr val="FFFFFF"/>
                 </a:solidFill>
@@ -8121,8 +8144,8 @@
         </p:nvSpPr>
         <p:spPr>
           <a:xfrm>
-            <a:off x="512064" y="1325880"/>
-            <a:ext cx="11167567" cy="4837176"/>
+            <a:off x="512064" y="941832"/>
+            <a:ext cx="11167567" cy="5431536"/>
           </a:xfrm>
           <a:prstGeom prst="rect">
             <a:avLst/>
@@ -8137,12 +8160,12 @@
           <a:p>
             <a:pPr>
               <a:lnSpc>
-                <a:spcPct val="130000"/>
+                <a:spcPct val="110000"/>
               </a:lnSpc>
               <a:spcAft>
-                <a:spcPts val="1000"/>
-              </a:spcAft>
-              <a:defRPr sz="2000">
+                <a:spcPts val="400"/>
+              </a:spcAft>
+              <a:defRPr sz="1700">
                 <a:solidFill>
                   <a:srgbClr val="333333"/>
                 </a:solidFill>
@@ -8156,12 +8179,12 @@
           <a:p>
             <a:pPr>
               <a:lnSpc>
-                <a:spcPct val="130000"/>
+                <a:spcPct val="110000"/>
               </a:lnSpc>
               <a:spcAft>
-                <a:spcPts val="1000"/>
-              </a:spcAft>
-              <a:defRPr sz="2000">
+                <a:spcPts val="400"/>
+              </a:spcAft>
+              <a:defRPr sz="1700">
                 <a:solidFill>
                   <a:srgbClr val="333333"/>
                 </a:solidFill>
@@ -8175,12 +8198,12 @@
           <a:p>
             <a:pPr>
               <a:lnSpc>
-                <a:spcPct val="130000"/>
+                <a:spcPct val="110000"/>
               </a:lnSpc>
               <a:spcAft>
-                <a:spcPts val="1000"/>
-              </a:spcAft>
-              <a:defRPr sz="2000">
+                <a:spcPts val="400"/>
+              </a:spcAft>
+              <a:defRPr sz="1700">
                 <a:solidFill>
                   <a:srgbClr val="333333"/>
                 </a:solidFill>
@@ -8194,12 +8217,12 @@
           <a:p>
             <a:pPr>
               <a:lnSpc>
-                <a:spcPct val="130000"/>
+                <a:spcPct val="110000"/>
               </a:lnSpc>
               <a:spcAft>
-                <a:spcPts val="1000"/>
-              </a:spcAft>
-              <a:defRPr sz="2000">
+                <a:spcPts val="400"/>
+              </a:spcAft>
+              <a:defRPr sz="1700">
                 <a:solidFill>
                   <a:srgbClr val="333333"/>
                 </a:solidFill>
@@ -8213,12 +8236,12 @@
           <a:p>
             <a:pPr>
               <a:lnSpc>
-                <a:spcPct val="130000"/>
+                <a:spcPct val="110000"/>
               </a:lnSpc>
               <a:spcAft>
-                <a:spcPts val="1000"/>
-              </a:spcAft>
-              <a:defRPr sz="2000">
+                <a:spcPts val="400"/>
+              </a:spcAft>
+              <a:defRPr sz="1700">
                 <a:solidFill>
                   <a:srgbClr val="333333"/>
                 </a:solidFill>
@@ -8239,7 +8262,7 @@
         </p:nvSpPr>
         <p:spPr>
           <a:xfrm>
-            <a:off x="512064" y="6400800"/>
+            <a:off x="512064" y="6528816"/>
             <a:ext cx="11167567" cy="12700"/>
           </a:xfrm>
           <a:prstGeom prst="rect">
@@ -8282,7 +8305,7 @@
         </p:nvSpPr>
         <p:spPr>
           <a:xfrm>
-            <a:off x="10948111" y="6492240"/>
+            <a:off x="10948111" y="6620256"/>
             <a:ext cx="731520" cy="274320"/>
           </a:xfrm>
           <a:prstGeom prst="rect">
@@ -8337,7 +8360,7 @@
         <p:spPr>
           <a:xfrm>
             <a:off x="0" y="0"/>
-            <a:ext cx="12191695" cy="886968"/>
+            <a:ext cx="12191695" cy="658368"/>
           </a:xfrm>
           <a:prstGeom prst="rect">
             <a:avLst/>
@@ -8380,7 +8403,7 @@
         <p:spPr>
           <a:xfrm>
             <a:off x="0" y="0"/>
-            <a:ext cx="54864" cy="886968"/>
+            <a:ext cx="54864" cy="658368"/>
           </a:xfrm>
           <a:prstGeom prst="rect">
             <a:avLst/>
@@ -8422,7 +8445,7 @@
         </p:nvSpPr>
         <p:spPr>
           <a:xfrm>
-            <a:off x="10308031" y="283464"/>
+            <a:off x="10308031" y="169164"/>
             <a:ext cx="1371600" cy="320040"/>
           </a:xfrm>
           <a:prstGeom prst="roundRect">
@@ -8481,7 +8504,7 @@
         </p:nvSpPr>
         <p:spPr>
           <a:xfrm>
-            <a:off x="603504" y="260604"/>
+            <a:off x="603504" y="146304"/>
             <a:ext cx="9613087" cy="457200"/>
           </a:xfrm>
           <a:prstGeom prst="rect">
@@ -8496,7 +8519,7 @@
           <a:lstStyle/>
           <a:p>
             <a:pPr>
-              <a:defRPr sz="2400" b="1">
+              <a:defRPr sz="2000" b="1">
                 <a:solidFill>
                   <a:srgbClr val="FFFFFF"/>
                 </a:solidFill>
@@ -8517,8 +8540,8 @@
         </p:nvSpPr>
         <p:spPr>
           <a:xfrm>
-            <a:off x="512064" y="1325880"/>
-            <a:ext cx="5400903" cy="411480"/>
+            <a:off x="512064" y="941832"/>
+            <a:ext cx="5400903" cy="347472"/>
           </a:xfrm>
           <a:prstGeom prst="roundRect">
             <a:avLst/>
@@ -8552,9 +8575,9 @@
           <a:p>
             <a:pPr algn="ctr">
               <a:spcAft>
-                <a:spcPts val="800"/>
-              </a:spcAft>
-              <a:defRPr sz="2000" b="1">
+                <a:spcPts val="400"/>
+              </a:spcAft>
+              <a:defRPr sz="1600" b="1">
                 <a:solidFill>
                   <a:srgbClr val="003366"/>
                 </a:solidFill>
@@ -8575,8 +8598,8 @@
         </p:nvSpPr>
         <p:spPr>
           <a:xfrm>
-            <a:off x="512064" y="1874520"/>
-            <a:ext cx="5400903" cy="4471416"/>
+            <a:off x="512064" y="1371600"/>
+            <a:ext cx="5400903" cy="5065776"/>
           </a:xfrm>
           <a:prstGeom prst="rect">
             <a:avLst/>
@@ -8591,12 +8614,12 @@
           <a:p>
             <a:pPr>
               <a:lnSpc>
-                <a:spcPct val="130000"/>
+                <a:spcPct val="110000"/>
               </a:lnSpc>
               <a:spcAft>
-                <a:spcPts val="1000"/>
-              </a:spcAft>
-              <a:defRPr sz="1600">
+                <a:spcPts val="400"/>
+              </a:spcAft>
+              <a:defRPr sz="1400">
                 <a:solidFill>
                   <a:srgbClr val="333333"/>
                 </a:solidFill>
@@ -8610,12 +8633,12 @@
           <a:p>
             <a:pPr>
               <a:lnSpc>
-                <a:spcPct val="130000"/>
+                <a:spcPct val="110000"/>
               </a:lnSpc>
               <a:spcAft>
-                <a:spcPts val="1000"/>
-              </a:spcAft>
-              <a:defRPr sz="1600">
+                <a:spcPts val="400"/>
+              </a:spcAft>
+              <a:defRPr sz="1400">
                 <a:solidFill>
                   <a:srgbClr val="333333"/>
                 </a:solidFill>
@@ -8629,12 +8652,12 @@
           <a:p>
             <a:pPr>
               <a:lnSpc>
-                <a:spcPct val="130000"/>
+                <a:spcPct val="110000"/>
               </a:lnSpc>
               <a:spcAft>
-                <a:spcPts val="1000"/>
-              </a:spcAft>
-              <a:defRPr sz="1600">
+                <a:spcPts val="400"/>
+              </a:spcAft>
+              <a:defRPr sz="1400">
                 <a:solidFill>
                   <a:srgbClr val="333333"/>
                 </a:solidFill>
@@ -8655,8 +8678,8 @@
         </p:nvSpPr>
         <p:spPr>
           <a:xfrm>
-            <a:off x="6278727" y="1325880"/>
-            <a:ext cx="5400903" cy="411480"/>
+            <a:off x="6278727" y="941832"/>
+            <a:ext cx="5400903" cy="347472"/>
           </a:xfrm>
           <a:prstGeom prst="roundRect">
             <a:avLst/>
@@ -8690,9 +8713,9 @@
           <a:p>
             <a:pPr algn="ctr">
               <a:spcAft>
-                <a:spcPts val="800"/>
-              </a:spcAft>
-              <a:defRPr sz="2000" b="1">
+                <a:spcPts val="400"/>
+              </a:spcAft>
+              <a:defRPr sz="1600" b="1">
                 <a:solidFill>
                   <a:srgbClr val="003366"/>
                 </a:solidFill>
@@ -8713,8 +8736,8 @@
         </p:nvSpPr>
         <p:spPr>
           <a:xfrm>
-            <a:off x="6278727" y="1874520"/>
-            <a:ext cx="5400903" cy="4471416"/>
+            <a:off x="6278727" y="1371600"/>
+            <a:ext cx="5400903" cy="5065776"/>
           </a:xfrm>
           <a:prstGeom prst="rect">
             <a:avLst/>
@@ -8729,12 +8752,12 @@
           <a:p>
             <a:pPr>
               <a:lnSpc>
-                <a:spcPct val="130000"/>
+                <a:spcPct val="110000"/>
               </a:lnSpc>
               <a:spcAft>
-                <a:spcPts val="1000"/>
-              </a:spcAft>
-              <a:defRPr sz="1600">
+                <a:spcPts val="400"/>
+              </a:spcAft>
+              <a:defRPr sz="1400">
                 <a:solidFill>
                   <a:srgbClr val="333333"/>
                 </a:solidFill>
@@ -8748,12 +8771,12 @@
           <a:p>
             <a:pPr>
               <a:lnSpc>
-                <a:spcPct val="130000"/>
+                <a:spcPct val="110000"/>
               </a:lnSpc>
               <a:spcAft>
-                <a:spcPts val="1000"/>
-              </a:spcAft>
-              <a:defRPr sz="1600">
+                <a:spcPts val="400"/>
+              </a:spcAft>
+              <a:defRPr sz="1400">
                 <a:solidFill>
                   <a:srgbClr val="333333"/>
                 </a:solidFill>
@@ -8767,12 +8790,12 @@
           <a:p>
             <a:pPr>
               <a:lnSpc>
-                <a:spcPct val="130000"/>
+                <a:spcPct val="110000"/>
               </a:lnSpc>
               <a:spcAft>
-                <a:spcPts val="1000"/>
-              </a:spcAft>
-              <a:defRPr sz="1600">
+                <a:spcPts val="400"/>
+              </a:spcAft>
+              <a:defRPr sz="1400">
                 <a:solidFill>
                   <a:srgbClr val="333333"/>
                 </a:solidFill>
@@ -8793,7 +8816,7 @@
         </p:nvSpPr>
         <p:spPr>
           <a:xfrm>
-            <a:off x="512064" y="6400800"/>
+            <a:off x="512064" y="6528816"/>
             <a:ext cx="11167567" cy="12700"/>
           </a:xfrm>
           <a:prstGeom prst="rect">
@@ -8836,7 +8859,7 @@
         </p:nvSpPr>
         <p:spPr>
           <a:xfrm>
-            <a:off x="10948111" y="6492240"/>
+            <a:off x="10948111" y="6620256"/>
             <a:ext cx="731520" cy="274320"/>
           </a:xfrm>
           <a:prstGeom prst="rect">
@@ -8891,7 +8914,7 @@
         <p:spPr>
           <a:xfrm>
             <a:off x="0" y="0"/>
-            <a:ext cx="12191695" cy="886968"/>
+            <a:ext cx="12191695" cy="658368"/>
           </a:xfrm>
           <a:prstGeom prst="rect">
             <a:avLst/>
@@ -8934,7 +8957,7 @@
         <p:spPr>
           <a:xfrm>
             <a:off x="0" y="0"/>
-            <a:ext cx="54864" cy="886968"/>
+            <a:ext cx="54864" cy="658368"/>
           </a:xfrm>
           <a:prstGeom prst="rect">
             <a:avLst/>
@@ -8976,7 +8999,7 @@
         </p:nvSpPr>
         <p:spPr>
           <a:xfrm>
-            <a:off x="10308031" y="283464"/>
+            <a:off x="10308031" y="169164"/>
             <a:ext cx="1371600" cy="320040"/>
           </a:xfrm>
           <a:prstGeom prst="roundRect">
@@ -9035,7 +9058,7 @@
         </p:nvSpPr>
         <p:spPr>
           <a:xfrm>
-            <a:off x="603504" y="260604"/>
+            <a:off x="603504" y="146304"/>
             <a:ext cx="9613087" cy="457200"/>
           </a:xfrm>
           <a:prstGeom prst="rect">
@@ -9050,7 +9073,7 @@
           <a:lstStyle/>
           <a:p>
             <a:pPr>
-              <a:defRPr sz="2400" b="1">
+              <a:defRPr sz="2000" b="1">
                 <a:solidFill>
                   <a:srgbClr val="FFFFFF"/>
                 </a:solidFill>
@@ -9071,8 +9094,8 @@
         </p:nvSpPr>
         <p:spPr>
           <a:xfrm>
-            <a:off x="512064" y="1325880"/>
-            <a:ext cx="11167567" cy="4837176"/>
+            <a:off x="512064" y="941832"/>
+            <a:ext cx="11167567" cy="5431536"/>
           </a:xfrm>
           <a:prstGeom prst="rect">
             <a:avLst/>
@@ -9087,12 +9110,12 @@
           <a:p>
             <a:pPr>
               <a:lnSpc>
-                <a:spcPct val="130000"/>
+                <a:spcPct val="110000"/>
               </a:lnSpc>
               <a:spcAft>
-                <a:spcPts val="1000"/>
-              </a:spcAft>
-              <a:defRPr sz="2000">
+                <a:spcPts val="400"/>
+              </a:spcAft>
+              <a:defRPr sz="1700">
                 <a:solidFill>
                   <a:srgbClr val="333333"/>
                 </a:solidFill>
@@ -9106,12 +9129,12 @@
           <a:p>
             <a:pPr>
               <a:lnSpc>
-                <a:spcPct val="130000"/>
+                <a:spcPct val="110000"/>
               </a:lnSpc>
               <a:spcAft>
-                <a:spcPts val="1000"/>
-              </a:spcAft>
-              <a:defRPr sz="2000">
+                <a:spcPts val="400"/>
+              </a:spcAft>
+              <a:defRPr sz="1700">
                 <a:solidFill>
                   <a:srgbClr val="333333"/>
                 </a:solidFill>
@@ -9125,12 +9148,12 @@
           <a:p>
             <a:pPr>
               <a:lnSpc>
-                <a:spcPct val="130000"/>
+                <a:spcPct val="110000"/>
               </a:lnSpc>
               <a:spcAft>
-                <a:spcPts val="1000"/>
-              </a:spcAft>
-              <a:defRPr sz="2000">
+                <a:spcPts val="400"/>
+              </a:spcAft>
+              <a:defRPr sz="1700">
                 <a:solidFill>
                   <a:srgbClr val="333333"/>
                 </a:solidFill>
@@ -9144,12 +9167,12 @@
           <a:p>
             <a:pPr>
               <a:lnSpc>
-                <a:spcPct val="130000"/>
+                <a:spcPct val="110000"/>
               </a:lnSpc>
               <a:spcAft>
-                <a:spcPts val="1000"/>
-              </a:spcAft>
-              <a:defRPr sz="2000">
+                <a:spcPts val="400"/>
+              </a:spcAft>
+              <a:defRPr sz="1700">
                 <a:solidFill>
                   <a:srgbClr val="333333"/>
                 </a:solidFill>
@@ -9163,12 +9186,12 @@
           <a:p>
             <a:pPr>
               <a:lnSpc>
-                <a:spcPct val="130000"/>
+                <a:spcPct val="110000"/>
               </a:lnSpc>
               <a:spcAft>
-                <a:spcPts val="1000"/>
-              </a:spcAft>
-              <a:defRPr sz="2000">
+                <a:spcPts val="400"/>
+              </a:spcAft>
+              <a:defRPr sz="1700">
                 <a:solidFill>
                   <a:srgbClr val="333333"/>
                 </a:solidFill>
@@ -9189,7 +9212,7 @@
         </p:nvSpPr>
         <p:spPr>
           <a:xfrm>
-            <a:off x="512064" y="6400800"/>
+            <a:off x="512064" y="6528816"/>
             <a:ext cx="11167567" cy="12700"/>
           </a:xfrm>
           <a:prstGeom prst="rect">
@@ -9232,7 +9255,7 @@
         </p:nvSpPr>
         <p:spPr>
           <a:xfrm>
-            <a:off x="10948111" y="6492240"/>
+            <a:off x="10948111" y="6620256"/>
             <a:ext cx="731520" cy="274320"/>
           </a:xfrm>
           <a:prstGeom prst="rect">
